--- a/module8/SpaceX_PowerBI_Dashboard_Design.pptx
+++ b/module8/SpaceX_PowerBI_Dashboard_Design.pptx
@@ -4362,6 +4362,11 @@
               </a:defRPr>
             </a:pPr>
             <a:r>
+              <a:rPr>
+                <a:solidFill>
+                  <a:srgbClr val="005DAA"/>
+                </a:solidFill>
+              </a:rPr>
               <a:t>Page 1: Executive Summary Dashboard</a:t>
             </a:r>
           </a:p>
@@ -5177,6 +5182,11 @@
               </a:defRPr>
             </a:pPr>
             <a:r>
+              <a:rPr>
+                <a:solidFill>
+                  <a:srgbClr val="005DAA"/>
+                </a:solidFill>
+              </a:rPr>
               <a:t>Page 2: ROI &amp; Improvement Opportunities</a:t>
             </a:r>
           </a:p>
@@ -5725,6 +5735,11 @@
               </a:defRPr>
             </a:pPr>
             <a:r>
+              <a:rPr>
+                <a:solidFill>
+                  <a:srgbClr val="005DAA"/>
+                </a:solidFill>
+              </a:rPr>
               <a:t>Page 3: Success Metrics &amp; Achievements</a:t>
             </a:r>
           </a:p>

--- a/module8/SpaceX_PowerBI_Dashboard_Design.pptx
+++ b/module8/SpaceX_PowerBI_Dashboard_Design.pptx
@@ -4346,7 +4346,9 @@
           <a:prstGeom prst="rect">
             <a:avLst/>
           </a:prstGeom>
-          <a:noFill/>
+          <a:solidFill>
+            <a:srgbClr val="005DAA"/>
+          </a:solidFill>
         </p:spPr>
         <p:txBody>
           <a:bodyPr wrap="none">
@@ -4364,7 +4366,7 @@
             <a:r>
               <a:rPr>
                 <a:solidFill>
-                  <a:srgbClr val="005DAA"/>
+                  <a:srgbClr val="292929"/>
                 </a:solidFill>
               </a:rPr>
               <a:t>Page 1: Executive Summary Dashboard</a:t>
@@ -5166,7 +5168,9 @@
           <a:prstGeom prst="rect">
             <a:avLst/>
           </a:prstGeom>
-          <a:noFill/>
+          <a:solidFill>
+            <a:srgbClr val="005DAA"/>
+          </a:solidFill>
         </p:spPr>
         <p:txBody>
           <a:bodyPr wrap="none">
@@ -5184,7 +5188,7 @@
             <a:r>
               <a:rPr>
                 <a:solidFill>
-                  <a:srgbClr val="005DAA"/>
+                  <a:srgbClr val="292929"/>
                 </a:solidFill>
               </a:rPr>
               <a:t>Page 2: ROI &amp; Improvement Opportunities</a:t>
@@ -5719,7 +5723,9 @@
           <a:prstGeom prst="rect">
             <a:avLst/>
           </a:prstGeom>
-          <a:noFill/>
+          <a:solidFill>
+            <a:srgbClr val="005DAA"/>
+          </a:solidFill>
         </p:spPr>
         <p:txBody>
           <a:bodyPr wrap="none">
@@ -5737,7 +5743,7 @@
             <a:r>
               <a:rPr>
                 <a:solidFill>
-                  <a:srgbClr val="005DAA"/>
+                  <a:srgbClr val="292929"/>
                 </a:solidFill>
               </a:rPr>
               <a:t>Page 3: Success Metrics &amp; Achievements</a:t>

--- a/module8/SpaceX_PowerBI_Dashboard_Design.pptx
+++ b/module8/SpaceX_PowerBI_Dashboard_Design.pptx
@@ -5126,7 +5126,7 @@
             <a:avLst/>
           </a:prstGeom>
           <a:solidFill>
-            <a:srgbClr val="8B5CF6"/>
+            <a:srgbClr val="005DAA"/>
           </a:solidFill>
           <a:ln>
             <a:noFill/>
@@ -5681,7 +5681,7 @@
             <a:avLst/>
           </a:prstGeom>
           <a:solidFill>
-            <a:srgbClr val="22C55E"/>
+            <a:srgbClr val="005DAA"/>
           </a:solidFill>
           <a:ln>
             <a:noFill/>

--- a/module8/SpaceX_PowerBI_Dashboard_Design.pptx
+++ b/module8/SpaceX_PowerBI_Dashboard_Design.pptx
@@ -4835,12 +4835,20 @@
           </a:p>
         </p:txBody>
       </p:sp>
-      <p:sp>
-        <p:nvSpPr>
-          <p:cNvPr id="13" name="TextBox 12"/>
-          <p:cNvSpPr txBox="1"/>
+      <p:pic>
+        <p:nvPicPr>
+          <p:cNvPr id="18" name="Picture 17" descr="page1_launch_cadence.png"/>
+          <p:cNvPicPr>
+            <a:picLocks noChangeAspect="1"/>
+          </p:cNvPicPr>
           <p:nvPr/>
-        </p:nvSpPr>
+        </p:nvPicPr>
+        <p:blipFill>
+          <a:blip r:embed="rId2"/>
+          <a:stretch>
+            <a:fillRect/>
+          </a:stretch>
+        </p:blipFill>
         <p:spPr>
           <a:xfrm>
             <a:off x="640080" y="2651760"/>
@@ -4849,39 +4857,8 @@
           <a:prstGeom prst="rect">
             <a:avLst/>
           </a:prstGeom>
-          <a:noFill/>
-        </p:spPr>
-        <p:txBody>
-          <a:bodyPr wrap="none">
-            <a:spAutoFit/>
-          </a:bodyPr>
-          <a:lstStyle/>
-          <a:p>
-            <a:pPr>
-              <a:defRPr sz="1400" b="1">
-                <a:solidFill>
-                  <a:srgbClr val="292929"/>
-                </a:solidFill>
-              </a:defRPr>
-            </a:pPr>
-            <a:r>
-              <a:t>Launch Cadence Trend (2018-2024)</a:t>
-            </a:r>
-          </a:p>
-          <a:p>
-            <a:pPr>
-              <a:defRPr sz="1100">
-                <a:solidFill>
-                  <a:srgbClr val="475569"/>
-                </a:solidFill>
-              </a:defRPr>
-            </a:pPr>
-            <a:r>
-              <a:t>📈 Line chart showing exponential growth</a:t>
-            </a:r>
-          </a:p>
-        </p:txBody>
-      </p:sp>
+        </p:spPr>
+      </p:pic>
       <p:sp>
         <p:nvSpPr>
           <p:cNvPr id="14" name="Rectangle 13"/>
@@ -4927,12 +4904,20 @@
           </a:p>
         </p:txBody>
       </p:sp>
-      <p:sp>
-        <p:nvSpPr>
-          <p:cNvPr id="15" name="TextBox 14"/>
-          <p:cNvSpPr txBox="1"/>
+      <p:pic>
+        <p:nvPicPr>
+          <p:cNvPr id="19" name="Picture 18" descr="page1_mission_success.png"/>
+          <p:cNvPicPr>
+            <a:picLocks noChangeAspect="1"/>
+          </p:cNvPicPr>
           <p:nvPr/>
-        </p:nvSpPr>
+        </p:nvPicPr>
+        <p:blipFill>
+          <a:blip r:embed="rId3"/>
+          <a:stretch>
+            <a:fillRect/>
+          </a:stretch>
+        </p:blipFill>
         <p:spPr>
           <a:xfrm>
             <a:off x="4937760" y="2651760"/>
@@ -4941,39 +4926,8 @@
           <a:prstGeom prst="rect">
             <a:avLst/>
           </a:prstGeom>
-          <a:noFill/>
-        </p:spPr>
-        <p:txBody>
-          <a:bodyPr wrap="none">
-            <a:spAutoFit/>
-          </a:bodyPr>
-          <a:lstStyle/>
-          <a:p>
-            <a:pPr>
-              <a:defRPr sz="1400" b="1">
-                <a:solidFill>
-                  <a:srgbClr val="292929"/>
-                </a:solidFill>
-              </a:defRPr>
-            </a:pPr>
-            <a:r>
-              <a:t>Mission Success Analytics</a:t>
-            </a:r>
-          </a:p>
-          <a:p>
-            <a:pPr>
-              <a:defRPr sz="1100">
-                <a:solidFill>
-                  <a:srgbClr val="475569"/>
-                </a:solidFill>
-              </a:defRPr>
-            </a:pPr>
-            <a:r>
-              <a:t>🎯 Radial gauge + success breakdown by vehicle</a:t>
-            </a:r>
-          </a:p>
-        </p:txBody>
-      </p:sp>
+        </p:spPr>
+      </p:pic>
       <p:sp>
         <p:nvSpPr>
           <p:cNvPr id="16" name="Rectangle 15"/>
@@ -5241,12 +5195,20 @@
           </a:p>
         </p:txBody>
       </p:sp>
-      <p:sp>
-        <p:nvSpPr>
-          <p:cNvPr id="5" name="TextBox 4"/>
-          <p:cNvSpPr txBox="1"/>
+      <p:pic>
+        <p:nvPicPr>
+          <p:cNvPr id="10" name="Picture 9" descr="page2_roi_waterfall.png"/>
+          <p:cNvPicPr>
+            <a:picLocks noChangeAspect="1"/>
+          </p:cNvPicPr>
           <p:nvPr/>
-        </p:nvSpPr>
+        </p:nvPicPr>
+        <p:blipFill>
+          <a:blip r:embed="rId2"/>
+          <a:stretch>
+            <a:fillRect/>
+          </a:stretch>
+        </p:blipFill>
         <p:spPr>
           <a:xfrm>
             <a:off x="640080" y="1188720"/>
@@ -5255,99 +5217,8 @@
           <a:prstGeom prst="rect">
             <a:avLst/>
           </a:prstGeom>
-          <a:noFill/>
-        </p:spPr>
-        <p:txBody>
-          <a:bodyPr wrap="none">
-            <a:spAutoFit/>
-          </a:bodyPr>
-          <a:lstStyle/>
-          <a:p>
-            <a:pPr>
-              <a:defRPr sz="1400" b="1">
-                <a:solidFill>
-                  <a:srgbClr val="292929"/>
-                </a:solidFill>
-              </a:defRPr>
-            </a:pPr>
-            <a:r>
-              <a:t>Reusability ROI Waterfall</a:t>
-            </a:r>
-          </a:p>
-          <a:p>
-            <a:pPr>
-              <a:defRPr sz="1100">
-                <a:solidFill>
-                  <a:srgbClr val="475569"/>
-                </a:solidFill>
-              </a:defRPr>
-            </a:pPr>
-            <a:r>
-              <a:t>💰 Waterfall chart showing cost savings progression:</a:t>
-            </a:r>
-          </a:p>
-          <a:p>
-            <a:pPr>
-              <a:defRPr sz="1000">
-                <a:solidFill>
-                  <a:srgbClr val="292929"/>
-                </a:solidFill>
-              </a:defRPr>
-            </a:pPr>
-            <a:r>
-              <a:t>• Base launch cost: $62M</a:t>
-            </a:r>
-          </a:p>
-          <a:p>
-            <a:pPr>
-              <a:defRPr sz="1000">
-                <a:solidFill>
-                  <a:srgbClr val="22C55E"/>
-                </a:solidFill>
-              </a:defRPr>
-            </a:pPr>
-            <a:r>
-              <a:t>• First stage reuse: -$30M (48% savings)</a:t>
-            </a:r>
-          </a:p>
-          <a:p>
-            <a:pPr>
-              <a:defRPr sz="1000">
-                <a:solidFill>
-                  <a:srgbClr val="22C55E"/>
-                </a:solidFill>
-              </a:defRPr>
-            </a:pPr>
-            <a:r>
-              <a:t>• Fairing recovery: -$6M (10% savings)</a:t>
-            </a:r>
-          </a:p>
-          <a:p>
-            <a:pPr>
-              <a:defRPr sz="1000">
-                <a:solidFill>
-                  <a:srgbClr val="22C55E"/>
-                </a:solidFill>
-              </a:defRPr>
-            </a:pPr>
-            <a:r>
-              <a:t>• Operational efficiency: -$6M (10% savings)</a:t>
-            </a:r>
-          </a:p>
-          <a:p>
-            <a:pPr>
-              <a:defRPr sz="1000">
-                <a:solidFill>
-                  <a:srgbClr val="292929"/>
-                </a:solidFill>
-              </a:defRPr>
-            </a:pPr>
-            <a:r>
-              <a:t>• Current cost: $20M (68% reduction)</a:t>
-            </a:r>
-          </a:p>
-        </p:txBody>
-      </p:sp>
+        </p:spPr>
+      </p:pic>
       <p:sp>
         <p:nvSpPr>
           <p:cNvPr id="6" name="Rectangle 5"/>
@@ -5393,12 +5264,20 @@
           </a:p>
         </p:txBody>
       </p:sp>
-      <p:sp>
-        <p:nvSpPr>
-          <p:cNvPr id="7" name="TextBox 6"/>
-          <p:cNvSpPr txBox="1"/>
+      <p:pic>
+        <p:nvPicPr>
+          <p:cNvPr id="11" name="Picture 10" descr="page2_priority_matrix.png"/>
+          <p:cNvPicPr>
+            <a:picLocks noChangeAspect="1"/>
+          </p:cNvPicPr>
           <p:nvPr/>
-        </p:nvSpPr>
+        </p:nvPicPr>
+        <p:blipFill>
+          <a:blip r:embed="rId3"/>
+          <a:stretch>
+            <a:fillRect/>
+          </a:stretch>
+        </p:blipFill>
         <p:spPr>
           <a:xfrm>
             <a:off x="6126480" y="1188720"/>
@@ -5407,99 +5286,8 @@
           <a:prstGeom prst="rect">
             <a:avLst/>
           </a:prstGeom>
-          <a:noFill/>
-        </p:spPr>
-        <p:txBody>
-          <a:bodyPr wrap="none">
-            <a:spAutoFit/>
-          </a:bodyPr>
-          <a:lstStyle/>
-          <a:p>
-            <a:pPr>
-              <a:defRPr sz="1400" b="1">
-                <a:solidFill>
-                  <a:srgbClr val="292929"/>
-                </a:solidFill>
-              </a:defRPr>
-            </a:pPr>
-            <a:r>
-              <a:t>Improvement Priority Matrix</a:t>
-            </a:r>
-          </a:p>
-          <a:p>
-            <a:pPr>
-              <a:defRPr sz="1100">
-                <a:solidFill>
-                  <a:srgbClr val="475569"/>
-                </a:solidFill>
-              </a:defRPr>
-            </a:pPr>
-            <a:r>
-              <a:t>🎯 2x2 Matrix (Impact vs Effort)</a:t>
-            </a:r>
-          </a:p>
-          <a:p>
-            <a:pPr>
-              <a:defRPr sz="900" b="1">
-                <a:solidFill>
-                  <a:srgbClr val="22C55E"/>
-                </a:solidFill>
-              </a:defRPr>
-            </a:pPr>
-            <a:r>
-              <a:t>High Impact/Low Effort:</a:t>
-            </a:r>
-          </a:p>
-          <a:p>
-            <a:pPr>
-              <a:defRPr sz="900" b="0">
-                <a:solidFill>
-                  <a:srgbClr val="292929"/>
-                </a:solidFill>
-              </a:defRPr>
-            </a:pPr>
-            <a:r>
-              <a:t>• Fairing catch improvement</a:t>
-            </a:r>
-          </a:p>
-          <a:p>
-            <a:pPr>
-              <a:defRPr sz="900" b="1">
-                <a:solidFill>
-                  <a:srgbClr val="FB923C"/>
-                </a:solidFill>
-              </a:defRPr>
-            </a:pPr>
-            <a:r>
-              <a:t>High Impact/High Effort:</a:t>
-            </a:r>
-          </a:p>
-          <a:p>
-            <a:pPr>
-              <a:defRPr sz="900" b="0">
-                <a:solidFill>
-                  <a:srgbClr val="292929"/>
-                </a:solidFill>
-              </a:defRPr>
-            </a:pPr>
-            <a:r>
-              <a:t>• Second stage recovery</a:t>
-            </a:r>
-          </a:p>
-          <a:p>
-            <a:pPr>
-              <a:defRPr sz="900" b="0">
-                <a:solidFill>
-                  <a:srgbClr val="292929"/>
-                </a:solidFill>
-              </a:defRPr>
-            </a:pPr>
-            <a:r>
-              <a:t>• Starship reliability</a:t>
-            </a:r>
-          </a:p>
-        </p:txBody>
-      </p:sp>
+        </p:spPr>
+      </p:pic>
       <p:sp>
         <p:nvSpPr>
           <p:cNvPr id="8" name="Rectangle 7"/>
@@ -5545,12 +5333,20 @@
           </a:p>
         </p:txBody>
       </p:sp>
-      <p:sp>
-        <p:nvSpPr>
-          <p:cNvPr id="9" name="TextBox 8"/>
-          <p:cNvSpPr txBox="1"/>
+      <p:pic>
+        <p:nvPicPr>
+          <p:cNvPr id="12" name="Picture 11" descr="page2_value_projection.png"/>
+          <p:cNvPicPr>
+            <a:picLocks noChangeAspect="1"/>
+          </p:cNvPicPr>
           <p:nvPr/>
-        </p:nvSpPr>
+        </p:nvPicPr>
+        <p:blipFill>
+          <a:blip r:embed="rId4"/>
+          <a:stretch>
+            <a:fillRect/>
+          </a:stretch>
+        </p:blipFill>
         <p:spPr>
           <a:xfrm>
             <a:off x="640080" y="3931920"/>
@@ -5559,87 +5355,8 @@
           <a:prstGeom prst="rect">
             <a:avLst/>
           </a:prstGeom>
-          <a:noFill/>
-        </p:spPr>
-        <p:txBody>
-          <a:bodyPr wrap="none">
-            <a:spAutoFit/>
-          </a:bodyPr>
-          <a:lstStyle/>
-          <a:p>
-            <a:pPr>
-              <a:defRPr sz="1400" b="1">
-                <a:solidFill>
-                  <a:srgbClr val="292929"/>
-                </a:solidFill>
-              </a:defRPr>
-            </a:pPr>
-            <a:r>
-              <a:t>Projected Value Creation (2025-2030)</a:t>
-            </a:r>
-          </a:p>
-          <a:p>
-            <a:pPr>
-              <a:defRPr sz="1100">
-                <a:solidFill>
-                  <a:srgbClr val="475569"/>
-                </a:solidFill>
-              </a:defRPr>
-            </a:pPr>
-            <a:r>
-              <a:t>📊 Stacked area chart showing cumulative savings potential</a:t>
-            </a:r>
-          </a:p>
-          <a:p>
-            <a:pPr>
-              <a:defRPr sz="1000">
-                <a:solidFill>
-                  <a:srgbClr val="005DAA"/>
-                </a:solidFill>
-              </a:defRPr>
-            </a:pPr>
-            <a:r>
-              <a:t>• Current trajectory: $2.5B saved through reusability</a:t>
-            </a:r>
-          </a:p>
-          <a:p>
-            <a:pPr>
-              <a:defRPr sz="1000">
-                <a:solidFill>
-                  <a:srgbClr val="8B5CF6"/>
-                </a:solidFill>
-              </a:defRPr>
-            </a:pPr>
-            <a:r>
-              <a:t>• With 2nd stage recovery: Additional $3.8B potential</a:t>
-            </a:r>
-          </a:p>
-          <a:p>
-            <a:pPr>
-              <a:defRPr sz="1000">
-                <a:solidFill>
-                  <a:srgbClr val="22C55E"/>
-                </a:solidFill>
-              </a:defRPr>
-            </a:pPr>
-            <a:r>
-              <a:t>• Starship success scenario: $15B+ market expansion</a:t>
-            </a:r>
-          </a:p>
-          <a:p>
-            <a:pPr>
-              <a:defRPr sz="1000">
-                <a:solidFill>
-                  <a:srgbClr val="FB923C"/>
-                </a:solidFill>
-              </a:defRPr>
-            </a:pPr>
-            <a:r>
-              <a:t>• Risk factor: 40% probability of full Starship capability by 2027</a:t>
-            </a:r>
-          </a:p>
-        </p:txBody>
-      </p:sp>
+        </p:spPr>
+      </p:pic>
     </p:spTree>
   </p:cSld>
   <p:clrMapOvr>
@@ -5796,12 +5513,20 @@
           </a:p>
         </p:txBody>
       </p:sp>
-      <p:sp>
-        <p:nvSpPr>
-          <p:cNvPr id="5" name="TextBox 4"/>
-          <p:cNvSpPr txBox="1"/>
+      <p:pic>
+        <p:nvPicPr>
+          <p:cNvPr id="12" name="Picture 11" descr="page3_timeline.png"/>
+          <p:cNvPicPr>
+            <a:picLocks noChangeAspect="1"/>
+          </p:cNvPicPr>
           <p:nvPr/>
-        </p:nvSpPr>
+        </p:nvPicPr>
+        <p:blipFill>
+          <a:blip r:embed="rId2"/>
+          <a:stretch>
+            <a:fillRect/>
+          </a:stretch>
+        </p:blipFill>
         <p:spPr>
           <a:xfrm>
             <a:off x="640080" y="1188720"/>
@@ -5810,51 +5535,8 @@
           <a:prstGeom prst="rect">
             <a:avLst/>
           </a:prstGeom>
-          <a:noFill/>
-        </p:spPr>
-        <p:txBody>
-          <a:bodyPr wrap="none">
-            <a:spAutoFit/>
-          </a:bodyPr>
-          <a:lstStyle/>
-          <a:p>
-            <a:pPr>
-              <a:defRPr sz="1400" b="1">
-                <a:solidFill>
-                  <a:srgbClr val="292929"/>
-                </a:solidFill>
-              </a:defRPr>
-            </a:pPr>
-            <a:r>
-              <a:t>Historic Milestones Timeline</a:t>
-            </a:r>
-          </a:p>
-          <a:p>
-            <a:pPr>
-              <a:defRPr sz="1100">
-                <a:solidFill>
-                  <a:srgbClr val="475569"/>
-                </a:solidFill>
-              </a:defRPr>
-            </a:pPr>
-            <a:r>
-              <a:t>📅 Interactive timeline with key achievements</a:t>
-            </a:r>
-          </a:p>
-          <a:p>
-            <a:pPr>
-              <a:defRPr sz="1000">
-                <a:solidFill>
-                  <a:srgbClr val="005DAA"/>
-                </a:solidFill>
-              </a:defRPr>
-            </a:pPr>
-            <a:r>
-              <a:t>2008: First successful Falcon 1 | 2015: First landing | 2017: First reuse | 2020: Crew Dragon | 2024: 134 launches</a:t>
-            </a:r>
-          </a:p>
-        </p:txBody>
-      </p:sp>
+        </p:spPr>
+      </p:pic>
       <p:sp>
         <p:nvSpPr>
           <p:cNvPr id="6" name="Rectangle 5"/>
@@ -5900,12 +5582,20 @@
           </a:p>
         </p:txBody>
       </p:sp>
-      <p:sp>
-        <p:nvSpPr>
-          <p:cNvPr id="7" name="TextBox 6"/>
-          <p:cNvSpPr txBox="1"/>
+      <p:pic>
+        <p:nvPicPr>
+          <p:cNvPr id="13" name="Picture 12" descr="page3_landing_evolution.png"/>
+          <p:cNvPicPr>
+            <a:picLocks noChangeAspect="1"/>
+          </p:cNvPicPr>
           <p:nvPr/>
-        </p:nvSpPr>
+        </p:nvPicPr>
+        <p:blipFill>
+          <a:blip r:embed="rId3"/>
+          <a:stretch>
+            <a:fillRect/>
+          </a:stretch>
+        </p:blipFill>
         <p:spPr>
           <a:xfrm>
             <a:off x="640080" y="2743200"/>
@@ -5914,87 +5604,8 @@
           <a:prstGeom prst="rect">
             <a:avLst/>
           </a:prstGeom>
-          <a:noFill/>
-        </p:spPr>
-        <p:txBody>
-          <a:bodyPr wrap="none">
-            <a:spAutoFit/>
-          </a:bodyPr>
-          <a:lstStyle/>
-          <a:p>
-            <a:pPr>
-              <a:defRPr sz="1400" b="1">
-                <a:solidFill>
-                  <a:srgbClr val="292929"/>
-                </a:solidFill>
-              </a:defRPr>
-            </a:pPr>
-            <a:r>
-              <a:t>Landing Success Evolution</a:t>
-            </a:r>
-          </a:p>
-          <a:p>
-            <a:pPr>
-              <a:defRPr sz="1100">
-                <a:solidFill>
-                  <a:srgbClr val="475569"/>
-                </a:solidFill>
-              </a:defRPr>
-            </a:pPr>
-            <a:r>
-              <a:t>📈 Area chart showing improvement</a:t>
-            </a:r>
-          </a:p>
-          <a:p>
-            <a:pPr>
-              <a:defRPr sz="1000">
-                <a:solidFill>
-                  <a:srgbClr val="EF4444"/>
-                </a:solidFill>
-              </a:defRPr>
-            </a:pPr>
-            <a:r>
-              <a:t>• 2015: 0% success rate</a:t>
-            </a:r>
-          </a:p>
-          <a:p>
-            <a:pPr>
-              <a:defRPr sz="1000">
-                <a:solidFill>
-                  <a:srgbClr val="FB923C"/>
-                </a:solidFill>
-              </a:defRPr>
-            </a:pPr>
-            <a:r>
-              <a:t>• 2017: 41% success rate</a:t>
-            </a:r>
-          </a:p>
-          <a:p>
-            <a:pPr>
-              <a:defRPr sz="1000">
-                <a:solidFill>
-                  <a:srgbClr val="7DD3FC"/>
-                </a:solidFill>
-              </a:defRPr>
-            </a:pPr>
-            <a:r>
-              <a:t>• 2020: 85% success rate</a:t>
-            </a:r>
-          </a:p>
-          <a:p>
-            <a:pPr>
-              <a:defRPr sz="1000">
-                <a:solidFill>
-                  <a:srgbClr val="22C55E"/>
-                </a:solidFill>
-              </a:defRPr>
-            </a:pPr>
-            <a:r>
-              <a:t>• 2024: 95%+ success rate</a:t>
-            </a:r>
-          </a:p>
-        </p:txBody>
-      </p:sp>
+        </p:spPr>
+      </p:pic>
       <p:sp>
         <p:nvSpPr>
           <p:cNvPr id="8" name="Rectangle 7"/>
@@ -6040,12 +5651,20 @@
           </a:p>
         </p:txBody>
       </p:sp>
-      <p:sp>
-        <p:nvSpPr>
-          <p:cNvPr id="9" name="TextBox 8"/>
-          <p:cNvSpPr txBox="1"/>
+      <p:pic>
+        <p:nvPicPr>
+          <p:cNvPr id="14" name="Picture 13" descr="page3_reusability_champions.png"/>
+          <p:cNvPicPr>
+            <a:picLocks noChangeAspect="1"/>
+          </p:cNvPicPr>
           <p:nvPr/>
-        </p:nvSpPr>
+        </p:nvPicPr>
+        <p:blipFill>
+          <a:blip r:embed="rId4"/>
+          <a:stretch>
+            <a:fillRect/>
+          </a:stretch>
+        </p:blipFill>
         <p:spPr>
           <a:xfrm>
             <a:off x="4846320" y="2743200"/>
@@ -6054,87 +5673,8 @@
           <a:prstGeom prst="rect">
             <a:avLst/>
           </a:prstGeom>
-          <a:noFill/>
-        </p:spPr>
-        <p:txBody>
-          <a:bodyPr wrap="none">
-            <a:spAutoFit/>
-          </a:bodyPr>
-          <a:lstStyle/>
-          <a:p>
-            <a:pPr>
-              <a:defRPr sz="1400" b="1">
-                <a:solidFill>
-                  <a:srgbClr val="292929"/>
-                </a:solidFill>
-              </a:defRPr>
-            </a:pPr>
-            <a:r>
-              <a:t>Reusability Champions</a:t>
-            </a:r>
-          </a:p>
-          <a:p>
-            <a:pPr>
-              <a:defRPr sz="1100">
-                <a:solidFill>
-                  <a:srgbClr val="475569"/>
-                </a:solidFill>
-              </a:defRPr>
-            </a:pPr>
-            <a:r>
-              <a:t>🏆 Bar chart of top performing boosters</a:t>
-            </a:r>
-          </a:p>
-          <a:p>
-            <a:pPr>
-              <a:defRPr sz="1000">
-                <a:solidFill>
-                  <a:srgbClr val="005DAA"/>
-                </a:solidFill>
-              </a:defRPr>
-            </a:pPr>
-            <a:r>
-              <a:t>• B1067: 24 flights (record holder)</a:t>
-            </a:r>
-          </a:p>
-          <a:p>
-            <a:pPr>
-              <a:defRPr sz="1000">
-                <a:solidFill>
-                  <a:srgbClr val="292929"/>
-                </a:solidFill>
-              </a:defRPr>
-            </a:pPr>
-            <a:r>
-              <a:t>• B1061: 23 flights</a:t>
-            </a:r>
-          </a:p>
-          <a:p>
-            <a:pPr>
-              <a:defRPr sz="1000">
-                <a:solidFill>
-                  <a:srgbClr val="292929"/>
-                </a:solidFill>
-              </a:defRPr>
-            </a:pPr>
-            <a:r>
-              <a:t>• B1062: 22 flights</a:t>
-            </a:r>
-          </a:p>
-          <a:p>
-            <a:pPr>
-              <a:defRPr sz="1000">
-                <a:solidFill>
-                  <a:srgbClr val="292929"/>
-                </a:solidFill>
-              </a:defRPr>
-            </a:pPr>
-            <a:r>
-              <a:t>• Fleet average: 12 flights per booster</a:t>
-            </a:r>
-          </a:p>
-        </p:txBody>
-      </p:sp>
+        </p:spPr>
+      </p:pic>
       <p:sp>
         <p:nvSpPr>
           <p:cNvPr id="10" name="Rectangle 9"/>

--- a/module8/SpaceX_PowerBI_Dashboard_Design.pptx
+++ b/module8/SpaceX_PowerBI_Dashboard_Design.pptx
@@ -4851,8 +4851,8 @@
         </p:blipFill>
         <p:spPr>
           <a:xfrm>
-            <a:off x="640080" y="2651760"/>
-            <a:ext cx="3657600" cy="457200"/>
+            <a:off x="457200" y="2560320"/>
+            <a:ext cx="4114800" cy="2286000"/>
           </a:xfrm>
           <a:prstGeom prst="rect">
             <a:avLst/>
@@ -4920,8 +4920,8 @@
         </p:blipFill>
         <p:spPr>
           <a:xfrm>
-            <a:off x="4937760" y="2651760"/>
-            <a:ext cx="3657600" cy="457200"/>
+            <a:off x="4754880" y="2560320"/>
+            <a:ext cx="3931920" cy="2286000"/>
           </a:xfrm>
           <a:prstGeom prst="rect">
             <a:avLst/>

--- a/module8/SpaceX_PowerBI_Dashboard_Design.pptx
+++ b/module8/SpaceX_PowerBI_Dashboard_Design.pptx
@@ -4449,31 +4449,30 @@
               </a:defRPr>
             </a:pPr>
             <a:r>
+              <a:rPr>
+                <a:solidFill>
+                  <a:srgbClr val="292929"/>
+                </a:solidFill>
+              </a:rPr>
               <a:t>Total Launches</a:t>
             </a:r>
-          </a:p>
-          <a:p>
-            <a:pPr>
-              <a:defRPr sz="2400" b="1">
-                <a:solidFill>
-                  <a:srgbClr val="005DAA"/>
-                </a:solidFill>
-              </a:defRPr>
-            </a:pPr>
-            <a:r>
+            <a:br/>
+            <a:r>
+              <a:rPr>
+                <a:solidFill>
+                  <a:srgbClr val="292929"/>
+                </a:solidFill>
+              </a:rPr>
               <a:t>578</a:t>
             </a:r>
-          </a:p>
-          <a:p>
-            <a:pPr>
-              <a:defRPr sz="900">
-                <a:solidFill>
-                  <a:srgbClr val="22C55E"/>
-                </a:solidFill>
-              </a:defRPr>
-            </a:pPr>
-            <a:r>
-              <a:t>+134 YoY</a:t>
+            <a:br/>
+            <a:r>
+              <a:rPr>
+                <a:solidFill>
+                  <a:srgbClr val="292929"/>
+                </a:solidFill>
+              </a:rPr>
+              <a:t>+33 YoY</a:t>
             </a:r>
           </a:p>
         </p:txBody>
@@ -4553,31 +4552,30 @@
               </a:defRPr>
             </a:pPr>
             <a:r>
+              <a:rPr>
+                <a:solidFill>
+                  <a:srgbClr val="292929"/>
+                </a:solidFill>
+              </a:rPr>
               <a:t>Success Rate</a:t>
             </a:r>
-          </a:p>
-          <a:p>
-            <a:pPr>
-              <a:defRPr sz="2400" b="1">
-                <a:solidFill>
-                  <a:srgbClr val="22C55E"/>
-                </a:solidFill>
-              </a:defRPr>
-            </a:pPr>
-            <a:r>
-              <a:t>97.8%</a:t>
-            </a:r>
-          </a:p>
-          <a:p>
-            <a:pPr>
-              <a:defRPr sz="900">
-                <a:solidFill>
-                  <a:srgbClr val="22C55E"/>
-                </a:solidFill>
-              </a:defRPr>
-            </a:pPr>
-            <a:r>
-              <a:t>+2.3%</a:t>
+            <a:br/>
+            <a:r>
+              <a:rPr>
+                <a:solidFill>
+                  <a:srgbClr val="292929"/>
+                </a:solidFill>
+              </a:rPr>
+              <a:t>98.6%</a:t>
+            </a:r>
+            <a:br/>
+            <a:r>
+              <a:rPr>
+                <a:solidFill>
+                  <a:srgbClr val="292929"/>
+                </a:solidFill>
+              </a:rPr>
+              <a:t>+1.3%</a:t>
             </a:r>
           </a:p>
         </p:txBody>
@@ -4657,31 +4655,30 @@
               </a:defRPr>
             </a:pPr>
             <a:r>
-              <a:t>Cost Reduction</a:t>
-            </a:r>
-          </a:p>
-          <a:p>
-            <a:pPr>
-              <a:defRPr sz="2400" b="1">
-                <a:solidFill>
-                  <a:srgbClr val="8B5CF6"/>
-                </a:solidFill>
-              </a:defRPr>
-            </a:pPr>
-            <a:r>
-              <a:t>73%</a:t>
-            </a:r>
-          </a:p>
-          <a:p>
-            <a:pPr>
-              <a:defRPr sz="900">
-                <a:solidFill>
-                  <a:srgbClr val="EF4444"/>
-                </a:solidFill>
-              </a:defRPr>
-            </a:pPr>
-            <a:r>
-              <a:t>-$47M</a:t>
+              <a:rPr>
+                <a:solidFill>
+                  <a:srgbClr val="292929"/>
+                </a:solidFill>
+              </a:rPr>
+              <a:t>Cost per Launch</a:t>
+            </a:r>
+            <a:br/>
+            <a:r>
+              <a:rPr>
+                <a:solidFill>
+                  <a:srgbClr val="292929"/>
+                </a:solidFill>
+              </a:rPr>
+              <a:t>$69M</a:t>
+            </a:r>
+            <a:br/>
+            <a:r>
+              <a:rPr>
+                <a:solidFill>
+                  <a:srgbClr val="292929"/>
+                </a:solidFill>
+              </a:rPr>
+              <a:t>(avg, list price)</a:t>
             </a:r>
           </a:p>
         </p:txBody>
@@ -4761,31 +4758,30 @@
               </a:defRPr>
             </a:pPr>
             <a:r>
+              <a:rPr>
+                <a:solidFill>
+                  <a:srgbClr val="292929"/>
+                </a:solidFill>
+              </a:rPr>
               <a:t>Reusability Rate</a:t>
             </a:r>
-          </a:p>
-          <a:p>
-            <a:pPr>
-              <a:defRPr sz="2400" b="1">
-                <a:solidFill>
-                  <a:srgbClr val="7DD3FC"/>
-                </a:solidFill>
-              </a:defRPr>
-            </a:pPr>
-            <a:r>
-              <a:t>89%</a:t>
-            </a:r>
-          </a:p>
-          <a:p>
-            <a:pPr>
-              <a:defRPr sz="900">
-                <a:solidFill>
-                  <a:srgbClr val="22C55E"/>
-                </a:solidFill>
-              </a:defRPr>
-            </a:pPr>
-            <a:r>
-              <a:t>+12%</a:t>
+            <a:br/>
+            <a:r>
+              <a:rPr>
+                <a:solidFill>
+                  <a:srgbClr val="292929"/>
+                </a:solidFill>
+              </a:rPr>
+              <a:t>97.8%</a:t>
+            </a:r>
+            <a:br/>
+            <a:r>
+              <a:rPr>
+                <a:solidFill>
+                  <a:srgbClr val="292929"/>
+                </a:solidFill>
+              </a:rPr>
+              <a:t>(2024 only)</a:t>
             </a:r>
           </a:p>
         </p:txBody>
@@ -5145,7 +5141,7 @@
                   <a:srgbClr val="292929"/>
                 </a:solidFill>
               </a:rPr>
-              <a:t>Page 2: ROI &amp; Improvement Opportunities</a:t>
+              <a:t>Page 2: ROI &amp; Improvement Opportunities (Estimates)</a:t>
             </a:r>
           </a:p>
         </p:txBody>
@@ -5357,6 +5353,41 @@
           </a:prstGeom>
         </p:spPr>
       </p:pic>
+      <p:sp>
+        <p:nvSpPr>
+          <p:cNvPr id="13" name="TextBox 12"/>
+          <p:cNvSpPr txBox="1"/>
+          <p:nvPr/>
+        </p:nvSpPr>
+        <p:spPr>
+          <a:xfrm>
+            <a:off x="457200" y="5943600"/>
+            <a:ext cx="8229600" cy="731520"/>
+          </a:xfrm>
+          <a:prstGeom prst="rect">
+            <a:avLst/>
+          </a:prstGeom>
+          <a:noFill/>
+        </p:spPr>
+        <p:txBody>
+          <a:bodyPr wrap="square">
+            <a:spAutoFit/>
+          </a:bodyPr>
+          <a:lstStyle/>
+          <a:p>
+            <a:pPr algn="ctr">
+              <a:defRPr sz="900" b="1">
+                <a:solidFill>
+                  <a:srgbClr val="FB923C"/>
+                </a:solidFill>
+              </a:defRPr>
+            </a:pPr>
+            <a:r>
+              <a:t>⚠️ DISCLAIMER: ROI calculations, priority matrix, and value projections are estimates based on industry analysis, not direct CSV data measurements.</a:t>
+            </a:r>
+          </a:p>
+        </p:txBody>
+      </p:sp>
     </p:spTree>
   </p:cSld>
   <p:clrMapOvr>
@@ -5782,6 +5813,19 @@
             </a:pPr>
             <a:r>
               <a:t>• Environmental: 90% reduction in space debris through controlled reentry</a:t>
+            </a:r>
+          </a:p>
+          <a:p>
+            <a:br/>
+            <a:pPr>
+              <a:defRPr sz="900" b="1">
+                <a:solidFill>
+                  <a:srgbClr val="FB923C"/>
+                </a:solidFill>
+              </a:defRPr>
+            </a:pPr>
+            <a:r>
+              <a:t>⚠️ Market share, cost comparisons, and booster flight counts (B1067: 24 flights) are from external sources, not CSV data.</a:t>
             </a:r>
           </a:p>
         </p:txBody>

--- a/module8/SpaceX_PowerBI_Dashboard_Design.pptx
+++ b/module8/SpaceX_PowerBI_Dashboard_Design.pptx
@@ -8,7 +8,6 @@
     <p:sldId id="256" r:id="rId7"/>
     <p:sldId id="257" r:id="rId8"/>
     <p:sldId id="258" r:id="rId9"/>
-    <p:sldId id="259" r:id="rId10"/>
     <p:sldId id="260" r:id="rId11"/>
     <p:sldId id="261" r:id="rId12"/>
   </p:sldIdLst>
@@ -3205,37 +3204,11 @@
             </a:r>
           </a:p>
           <a:p>
-            <a:pPr>
-              <a:defRPr sz="1600">
-                <a:solidFill>
-                  <a:srgbClr val="9CA3AF"/>
-                </a:solidFill>
-              </a:defRPr>
-            </a:pPr>
             <a:r>
               <a:t>• Executive Summary Dashboard</a:t>
             </a:r>
           </a:p>
           <a:p>
-            <a:pPr>
-              <a:defRPr sz="1600">
-                <a:solidFill>
-                  <a:srgbClr val="9CA3AF"/>
-                </a:solidFill>
-              </a:defRPr>
-            </a:pPr>
-            <a:r>
-              <a:t>• ROI &amp; Opportunity Analysis</a:t>
-            </a:r>
-          </a:p>
-          <a:p>
-            <a:pPr>
-              <a:defRPr sz="1600">
-                <a:solidFill>
-                  <a:srgbClr val="9CA3AF"/>
-                </a:solidFill>
-              </a:defRPr>
-            </a:pPr>
             <a:r>
               <a:t>• Success Metrics &amp; Achievements</a:t>
             </a:r>
@@ -4857,26 +4830,21 @@
       </p:pic>
       <p:sp>
         <p:nvSpPr>
-          <p:cNvPr id="14" name="Rectangle 13"/>
+          <p:cNvPr id="16" name="Rectangle 15"/>
           <p:cNvSpPr/>
           <p:nvPr/>
         </p:nvSpPr>
         <p:spPr>
           <a:xfrm>
-            <a:off x="4754880" y="2560320"/>
-            <a:ext cx="3931920" cy="2286000"/>
+            <a:off x="457200" y="5029200"/>
+            <a:ext cx="8229600" cy="1188720"/>
           </a:xfrm>
           <a:prstGeom prst="rect">
             <a:avLst/>
           </a:prstGeom>
           <a:solidFill>
-            <a:srgbClr val="FFFFFF"/>
+            <a:srgbClr val="292929"/>
           </a:solidFill>
-          <a:ln>
-            <a:solidFill>
-              <a:srgbClr val="9CA3AF"/>
-            </a:solidFill>
-          </a:ln>
         </p:spPr>
         <p:style>
           <a:lnRef idx="1">
@@ -4900,70 +4868,6 @@
           </a:p>
         </p:txBody>
       </p:sp>
-      <p:pic>
-        <p:nvPicPr>
-          <p:cNvPr id="19" name="Picture 18" descr="page1_mission_success.png"/>
-          <p:cNvPicPr>
-            <a:picLocks noChangeAspect="1"/>
-          </p:cNvPicPr>
-          <p:nvPr/>
-        </p:nvPicPr>
-        <p:blipFill>
-          <a:blip r:embed="rId3"/>
-          <a:stretch>
-            <a:fillRect/>
-          </a:stretch>
-        </p:blipFill>
-        <p:spPr>
-          <a:xfrm>
-            <a:off x="4754880" y="2560320"/>
-            <a:ext cx="3931920" cy="2286000"/>
-          </a:xfrm>
-          <a:prstGeom prst="rect">
-            <a:avLst/>
-          </a:prstGeom>
-        </p:spPr>
-      </p:pic>
-      <p:sp>
-        <p:nvSpPr>
-          <p:cNvPr id="16" name="Rectangle 15"/>
-          <p:cNvSpPr/>
-          <p:nvPr/>
-        </p:nvSpPr>
-        <p:spPr>
-          <a:xfrm>
-            <a:off x="457200" y="5029200"/>
-            <a:ext cx="8229600" cy="1188720"/>
-          </a:xfrm>
-          <a:prstGeom prst="rect">
-            <a:avLst/>
-          </a:prstGeom>
-          <a:solidFill>
-            <a:srgbClr val="292929"/>
-          </a:solidFill>
-        </p:spPr>
-        <p:style>
-          <a:lnRef idx="1">
-            <a:schemeClr val="accent1"/>
-          </a:lnRef>
-          <a:fillRef idx="3">
-            <a:schemeClr val="accent1"/>
-          </a:fillRef>
-          <a:effectRef idx="2">
-            <a:schemeClr val="accent1"/>
-          </a:effectRef>
-          <a:fontRef idx="minor">
-            <a:schemeClr val="lt1"/>
-          </a:fontRef>
-        </p:style>
-        <p:txBody>
-          <a:bodyPr rtlCol="0" anchor="ctr"/>
-          <a:lstStyle/>
-          <a:p>
-            <a:pPr algn="ctr"/>
-          </a:p>
-        </p:txBody>
-      </p:sp>
       <p:sp>
         <p:nvSpPr>
           <p:cNvPr id="17" name="TextBox 16"/>
@@ -4994,43 +4898,27 @@
               </a:defRPr>
             </a:pPr>
             <a:r>
-              <a:t>Key Insights</a:t>
-            </a:r>
-          </a:p>
-          <a:p>
-            <a:pPr>
-              <a:defRPr sz="1000">
-                <a:solidFill>
-                  <a:srgbClr val="FFFFFF"/>
-                </a:solidFill>
-              </a:defRPr>
-            </a:pPr>
-            <a:r>
-              <a:t>• 2024: Record 134 launches, exceeding all other providers combined</a:t>
-            </a:r>
-          </a:p>
-          <a:p>
-            <a:pPr>
-              <a:defRPr sz="1000">
-                <a:solidFill>
-                  <a:srgbClr val="FFFFFF"/>
-                </a:solidFill>
-              </a:defRPr>
-            </a:pPr>
-            <a:r>
-              <a:t>• Booster reusability reached 24 flights per vehicle (B1067)</a:t>
-            </a:r>
-          </a:p>
-          <a:p>
-            <a:pPr>
-              <a:defRPr sz="1000">
-                <a:solidFill>
-                  <a:srgbClr val="FFFFFF"/>
-                </a:solidFill>
-              </a:defRPr>
-            </a:pPr>
-            <a:r>
-              <a:t>• Critical improvement needed: Starship success rate at 33%</a:t>
+              <a:t>Key Insights (From CSV Data)</a:t>
+            </a:r>
+          </a:p>
+          <a:p>
+            <a:r>
+              <a:t>• 2024: Record 182 launches (up 33 from 2023)</a:t>
+            </a:r>
+          </a:p>
+          <a:p>
+            <a:r>
+              <a:t>• Overall success rate: 98.6% across 578 missions</a:t>
+            </a:r>
+          </a:p>
+          <a:p>
+            <a:r>
+              <a:t>• Booster reuse rate reached 97.8% in 2024</a:t>
+            </a:r>
+          </a:p>
+          <a:p>
+            <a:r>
+              <a:t>• Landing success improved from 50% (2015) to 99.4% (2024)</a:t>
             </a:r>
           </a:p>
         </p:txBody>
@@ -5141,7 +5029,7 @@
                   <a:srgbClr val="292929"/>
                 </a:solidFill>
               </a:rPr>
-              <a:t>Page 2: ROI &amp; Improvement Opportunities (Estimates)</a:t>
+              <a:t>Page 2: Success Metrics &amp; Achievements</a:t>
             </a:r>
           </a:p>
         </p:txBody>
@@ -5155,7 +5043,7 @@
         <p:spPr>
           <a:xfrm>
             <a:off x="457200" y="1097280"/>
-            <a:ext cx="5303520" cy="2560320"/>
+            <a:ext cx="8229600" cy="1371600"/>
           </a:xfrm>
           <a:prstGeom prst="rect">
             <a:avLst/>
@@ -5193,7 +5081,7 @@
       </p:sp>
       <p:pic>
         <p:nvPicPr>
-          <p:cNvPr id="10" name="Picture 9" descr="page2_roi_waterfall.png"/>
+          <p:cNvPr id="12" name="Picture 11" descr="page3_timeline.png"/>
           <p:cNvPicPr>
             <a:picLocks noChangeAspect="1"/>
           </p:cNvPicPr>
@@ -5208,7 +5096,7 @@
         <p:spPr>
           <a:xfrm>
             <a:off x="640080" y="1188720"/>
-            <a:ext cx="4937760" cy="2377440"/>
+            <a:ext cx="7863840" cy="1188720"/>
           </a:xfrm>
           <a:prstGeom prst="rect">
             <a:avLst/>
@@ -5223,8 +5111,8 @@
         </p:nvSpPr>
         <p:spPr>
           <a:xfrm>
-            <a:off x="5943600" y="1097280"/>
-            <a:ext cx="2743200" cy="2560320"/>
+            <a:off x="457200" y="2651760"/>
+            <a:ext cx="4114800" cy="2103120"/>
           </a:xfrm>
           <a:prstGeom prst="rect">
             <a:avLst/>
@@ -5262,7 +5150,7 @@
       </p:sp>
       <p:pic>
         <p:nvPicPr>
-          <p:cNvPr id="11" name="Picture 10" descr="page2_priority_matrix.png"/>
+          <p:cNvPr id="13" name="Picture 12" descr="page3_landing_evolution.png"/>
           <p:cNvPicPr>
             <a:picLocks noChangeAspect="1"/>
           </p:cNvPicPr>
@@ -5276,8 +5164,8 @@
         </p:blipFill>
         <p:spPr>
           <a:xfrm>
-            <a:off x="6126480" y="1188720"/>
-            <a:ext cx="2377440" cy="2377440"/>
+            <a:off x="640080" y="2743200"/>
+            <a:ext cx="3749039" cy="1920240"/>
           </a:xfrm>
           <a:prstGeom prst="rect">
             <a:avLst/>
@@ -5292,8 +5180,8 @@
         </p:nvSpPr>
         <p:spPr>
           <a:xfrm>
-            <a:off x="457200" y="3840480"/>
-            <a:ext cx="8229600" cy="2103120"/>
+            <a:off x="4663440" y="2651760"/>
+            <a:ext cx="4023360" cy="2103120"/>
           </a:xfrm>
           <a:prstGeom prst="rect">
             <a:avLst/>
@@ -5331,7 +5219,7 @@
       </p:sp>
       <p:pic>
         <p:nvPicPr>
-          <p:cNvPr id="12" name="Picture 11" descr="page2_value_projection.png"/>
+          <p:cNvPr id="14" name="Picture 13" descr="page3_reusability_champions.png"/>
           <p:cNvPicPr>
             <a:picLocks noChangeAspect="1"/>
           </p:cNvPicPr>
@@ -5345,8 +5233,8 @@
         </p:blipFill>
         <p:spPr>
           <a:xfrm>
-            <a:off x="640080" y="3931920"/>
-            <a:ext cx="7863840" cy="1920240"/>
+            <a:off x="4846320" y="2743200"/>
+            <a:ext cx="3657600" cy="1920240"/>
           </a:xfrm>
           <a:prstGeom prst="rect">
             <a:avLst/>
@@ -5355,36 +5243,41 @@
       </p:pic>
       <p:sp>
         <p:nvSpPr>
-          <p:cNvPr id="13" name="TextBox 12"/>
-          <p:cNvSpPr txBox="1"/>
+          <p:cNvPr id="10" name="Rectangle 9"/>
+          <p:cNvSpPr/>
           <p:nvPr/>
         </p:nvSpPr>
         <p:spPr>
           <a:xfrm>
-            <a:off x="457200" y="5943600"/>
-            <a:ext cx="8229600" cy="731520"/>
+            <a:off x="457200" y="4937760"/>
+            <a:ext cx="8229600" cy="1188720"/>
           </a:xfrm>
           <a:prstGeom prst="rect">
             <a:avLst/>
           </a:prstGeom>
-          <a:noFill/>
-        </p:spPr>
-        <p:txBody>
-          <a:bodyPr wrap="square">
-            <a:spAutoFit/>
-          </a:bodyPr>
-          <a:lstStyle/>
-          <a:p>
-            <a:pPr algn="ctr">
-              <a:defRPr sz="900" b="1">
-                <a:solidFill>
-                  <a:srgbClr val="FB923C"/>
-                </a:solidFill>
-              </a:defRPr>
-            </a:pPr>
-            <a:r>
-              <a:t>⚠️ DISCLAIMER: ROI calculations, priority matrix, and value projections are estimates based on industry analysis, not direct CSV data measurements.</a:t>
-            </a:r>
+          <a:solidFill>
+            <a:srgbClr val="292929"/>
+          </a:solidFill>
+        </p:spPr>
+        <p:style>
+          <a:lnRef idx="1">
+            <a:schemeClr val="accent1"/>
+          </a:lnRef>
+          <a:fillRef idx="3">
+            <a:schemeClr val="accent1"/>
+          </a:fillRef>
+          <a:effectRef idx="2">
+            <a:schemeClr val="accent1"/>
+          </a:effectRef>
+          <a:fontRef idx="minor">
+            <a:schemeClr val="lt1"/>
+          </a:fontRef>
+        </p:style>
+        <p:txBody>
+          <a:bodyPr rtlCol="0" anchor="ctr"/>
+          <a:lstStyle/>
+          <a:p>
+            <a:pPr algn="ctr"/>
           </a:p>
         </p:txBody>
       </p:sp>
@@ -5396,7 +5289,7 @@
 </p:sld>
 </file>
 
-<file path=ppt/slides/slide5.xml><?xml version="1.0" encoding="utf-8"?>
+<file path=ppt/slides/slide4.xml><?xml version="1.0" encoding="utf-8"?>
 <p:sld xmlns:a="http://schemas.openxmlformats.org/drawingml/2006/main" xmlns:p="http://schemas.openxmlformats.org/presentationml/2006/main" xmlns:r="http://schemas.openxmlformats.org/officeDocument/2006/relationships">
   <p:cSld>
     <p:bg>
@@ -5494,7 +5387,7 @@
                   <a:srgbClr val="292929"/>
                 </a:solidFill>
               </a:rPr>
-              <a:t>Page 3: Success Metrics &amp; Achievements</a:t>
+              <a:t>Page 2: Success Metrics &amp; Achievements</a:t>
             </a:r>
           </a:p>
         </p:txBody>
@@ -5746,90 +5639,6 @@
           </a:p>
         </p:txBody>
       </p:sp>
-      <p:sp>
-        <p:nvSpPr>
-          <p:cNvPr id="11" name="TextBox 10"/>
-          <p:cNvSpPr txBox="1"/>
-          <p:nvPr/>
-        </p:nvSpPr>
-        <p:spPr>
-          <a:xfrm>
-            <a:off x="640080" y="5029200"/>
-            <a:ext cx="7863840" cy="1005840"/>
-          </a:xfrm>
-          <a:prstGeom prst="rect">
-            <a:avLst/>
-          </a:prstGeom>
-          <a:noFill/>
-        </p:spPr>
-        <p:txBody>
-          <a:bodyPr wrap="none">
-            <a:spAutoFit/>
-          </a:bodyPr>
-          <a:lstStyle/>
-          <a:p>
-            <a:pPr>
-              <a:defRPr sz="1200" b="1">
-                <a:solidFill>
-                  <a:srgbClr val="22C55E"/>
-                </a:solidFill>
-              </a:defRPr>
-            </a:pPr>
-            <a:r>
-              <a:t>Key Success Metrics</a:t>
-            </a:r>
-          </a:p>
-          <a:p>
-            <a:pPr>
-              <a:defRPr sz="1000">
-                <a:solidFill>
-                  <a:srgbClr val="FFFFFF"/>
-                </a:solidFill>
-              </a:defRPr>
-            </a:pPr>
-            <a:r>
-              <a:t>• Market Leadership: 60%+ of global launch capacity | Cost Leadership: 75% cheaper than competitors</a:t>
-            </a:r>
-          </a:p>
-          <a:p>
-            <a:pPr>
-              <a:defRPr sz="1000">
-                <a:solidFill>
-                  <a:srgbClr val="FFFFFF"/>
-                </a:solidFill>
-              </a:defRPr>
-            </a:pPr>
-            <a:r>
-              <a:t>• Innovation Speed: 10x faster iteration than traditional aerospace | Safety: 100% crew mission success</a:t>
-            </a:r>
-          </a:p>
-          <a:p>
-            <a:pPr>
-              <a:defRPr sz="1000">
-                <a:solidFill>
-                  <a:srgbClr val="FFFFFF"/>
-                </a:solidFill>
-              </a:defRPr>
-            </a:pPr>
-            <a:r>
-              <a:t>• Environmental: 90% reduction in space debris through controlled reentry</a:t>
-            </a:r>
-          </a:p>
-          <a:p>
-            <a:br/>
-            <a:pPr>
-              <a:defRPr sz="900" b="1">
-                <a:solidFill>
-                  <a:srgbClr val="FB923C"/>
-                </a:solidFill>
-              </a:defRPr>
-            </a:pPr>
-            <a:r>
-              <a:t>⚠️ Market share, cost comparisons, and booster flight counts (B1067: 24 flights) are from external sources, not CSV data.</a:t>
-            </a:r>
-          </a:p>
-        </p:txBody>
-      </p:sp>
     </p:spTree>
   </p:cSld>
   <p:clrMapOvr>
@@ -5838,7 +5647,7 @@
 </p:sld>
 </file>
 
-<file path=ppt/slides/slide6.xml><?xml version="1.0" encoding="utf-8"?>
+<file path=ppt/slides/slide5.xml><?xml version="1.0" encoding="utf-8"?>
 <p:sld xmlns:a="http://schemas.openxmlformats.org/drawingml/2006/main" xmlns:p="http://schemas.openxmlformats.org/presentationml/2006/main" xmlns:r="http://schemas.openxmlformats.org/officeDocument/2006/relationships">
   <p:cSld>
     <p:bg>

--- a/module8/SpaceX_PowerBI_Dashboard_Design.pptx
+++ b/module8/SpaceX_PowerBI_Dashboard_Design.pptx
@@ -8,6 +8,7 @@
     <p:sldId id="256" r:id="rId7"/>
     <p:sldId id="257" r:id="rId8"/>
     <p:sldId id="258" r:id="rId9"/>
+    <p:sldId id="259" r:id="rId10"/>
     <p:sldId id="260" r:id="rId11"/>
     <p:sldId id="261" r:id="rId12"/>
   </p:sldIdLst>
@@ -3085,14 +3086,6 @@
 <file path=ppt/slides/slide1.xml><?xml version="1.0" encoding="utf-8"?>
 <p:sld xmlns:a="http://schemas.openxmlformats.org/drawingml/2006/main" xmlns:p="http://schemas.openxmlformats.org/presentationml/2006/main" xmlns:r="http://schemas.openxmlformats.org/officeDocument/2006/relationships">
   <p:cSld>
-    <p:bg>
-      <p:bgPr>
-        <a:solidFill>
-          <a:srgbClr val="292929"/>
-        </a:solidFill>
-        <a:effectLst/>
-      </p:bgPr>
-    </p:bg>
     <p:spTree>
       <p:nvGrpSpPr>
         <p:cNvPr id="1" name=""/>
@@ -3108,8 +3101,8 @@
         </p:nvSpPr>
         <p:spPr>
           <a:xfrm>
-            <a:off x="457200" y="914400"/>
-            <a:ext cx="8229600" cy="1371600"/>
+            <a:off x="914400" y="2286000"/>
+            <a:ext cx="7315200" cy="1828800"/>
           </a:xfrm>
           <a:prstGeom prst="rect">
             <a:avLst/>
@@ -3123,9 +3116,9 @@
           <a:lstStyle/>
           <a:p>
             <a:pPr algn="ctr">
-              <a:defRPr sz="4800" b="1">
-                <a:solidFill>
-                  <a:srgbClr val="FFFFFF"/>
+              <a:defRPr sz="4400" b="1">
+                <a:solidFill>
+                  <a:srgbClr val="005DAA"/>
                 </a:solidFill>
               </a:defRPr>
             </a:pPr>
@@ -3133,84 +3126,29 @@
               <a:t>SpaceX Launch Analytics</a:t>
             </a:r>
           </a:p>
-        </p:txBody>
-      </p:sp>
-      <p:sp>
-        <p:nvSpPr>
-          <p:cNvPr id="3" name="TextBox 2"/>
-          <p:cNvSpPr txBox="1"/>
-          <p:nvPr/>
-        </p:nvSpPr>
-        <p:spPr>
-          <a:xfrm>
-            <a:off x="457200" y="2286000"/>
-            <a:ext cx="8229600" cy="914400"/>
-          </a:xfrm>
-          <a:prstGeom prst="rect">
-            <a:avLst/>
-          </a:prstGeom>
-          <a:noFill/>
-        </p:spPr>
-        <p:txBody>
-          <a:bodyPr wrap="none">
-            <a:spAutoFit/>
-          </a:bodyPr>
-          <a:lstStyle/>
           <a:p>
             <a:pPr algn="ctr">
               <a:defRPr sz="2400">
                 <a:solidFill>
-                  <a:srgbClr val="005DAA"/>
-                </a:solidFill>
-              </a:defRPr>
-            </a:pPr>
-            <a:r>
-              <a:t>Power BI Dashboard Design Specification</a:t>
-            </a:r>
-          </a:p>
-        </p:txBody>
-      </p:sp>
-      <p:sp>
-        <p:nvSpPr>
-          <p:cNvPr id="4" name="TextBox 3"/>
-          <p:cNvSpPr txBox="1"/>
-          <p:nvPr/>
-        </p:nvSpPr>
-        <p:spPr>
-          <a:xfrm>
-            <a:off x="2286000" y="3657600"/>
-            <a:ext cx="4572000" cy="1828800"/>
-          </a:xfrm>
-          <a:prstGeom prst="rect">
-            <a:avLst/>
-          </a:prstGeom>
-          <a:noFill/>
-        </p:spPr>
-        <p:txBody>
-          <a:bodyPr wrap="none">
-            <a:spAutoFit/>
-          </a:bodyPr>
-          <a:lstStyle/>
-          <a:p>
-            <a:pPr>
-              <a:defRPr sz="2000" b="1">
-                <a:solidFill>
-                  <a:srgbClr val="FFFFFF"/>
-                </a:solidFill>
-              </a:defRPr>
-            </a:pPr>
-            <a:r>
-              <a:t>Dashboard Architecture</a:t>
-            </a:r>
-          </a:p>
-          <a:p>
-            <a:r>
-              <a:t>• Executive Summary Dashboard</a:t>
-            </a:r>
-          </a:p>
-          <a:p>
-            <a:r>
-              <a:t>• Success Metrics &amp; Achievements</a:t>
+                  <a:srgbClr val="292929"/>
+                </a:solidFill>
+              </a:defRPr>
+            </a:pPr>
+            <a:r>
+              <a:t>Power BI Dashboard Design</a:t>
+            </a:r>
+          </a:p>
+          <a:p>
+            <a:br/>
+            <a:pPr algn="ctr">
+              <a:defRPr sz="1800">
+                <a:solidFill>
+                  <a:srgbClr val="292929"/>
+                </a:solidFill>
+              </a:defRPr>
+            </a:pPr>
+            <a:r>
+              <a:t>Data-Driven Insights from 578 Launches</a:t>
             </a:r>
           </a:p>
         </p:txBody>
@@ -3226,14 +3164,6 @@
 <file path=ppt/slides/slide2.xml><?xml version="1.0" encoding="utf-8"?>
 <p:sld xmlns:a="http://schemas.openxmlformats.org/drawingml/2006/main" xmlns:p="http://schemas.openxmlformats.org/presentationml/2006/main" xmlns:r="http://schemas.openxmlformats.org/officeDocument/2006/relationships">
   <p:cSld>
-    <p:bg>
-      <p:bgPr>
-        <a:solidFill>
-          <a:srgbClr val="FFFFFF"/>
-        </a:solidFill>
-        <a:effectLst/>
-      </p:bgPr>
-    </p:bg>
     <p:spTree>
       <p:nvGrpSpPr>
         <p:cNvPr id="1" name=""/>
@@ -4247,14 +4177,6 @@
 <file path=ppt/slides/slide3.xml><?xml version="1.0" encoding="utf-8"?>
 <p:sld xmlns:a="http://schemas.openxmlformats.org/drawingml/2006/main" xmlns:p="http://schemas.openxmlformats.org/presentationml/2006/main" xmlns:r="http://schemas.openxmlformats.org/officeDocument/2006/relationships">
   <p:cSld>
-    <p:bg>
-      <p:bgPr>
-        <a:solidFill>
-          <a:srgbClr val="F8FAFC"/>
-        </a:solidFill>
-        <a:effectLst/>
-      </p:bgPr>
-    </p:bg>
     <p:spTree>
       <p:nvGrpSpPr>
         <p:cNvPr id="1" name=""/>
@@ -4319,9 +4241,7 @@
           <a:prstGeom prst="rect">
             <a:avLst/>
           </a:prstGeom>
-          <a:solidFill>
-            <a:srgbClr val="005DAA"/>
-          </a:solidFill>
+          <a:noFill/>
         </p:spPr>
         <p:txBody>
           <a:bodyPr wrap="none">
@@ -4337,19 +4257,14 @@
               </a:defRPr>
             </a:pPr>
             <a:r>
-              <a:rPr>
-                <a:solidFill>
-                  <a:srgbClr val="292929"/>
-                </a:solidFill>
-              </a:rPr>
-              <a:t>Page 1: Executive Summary Dashboard</a:t>
-            </a:r>
-          </a:p>
-        </p:txBody>
-      </p:sp>
-      <p:sp>
-        <p:nvSpPr>
-          <p:cNvPr id="4" name="Rounded Rectangle 3"/>
+              <a:t>Page 1: Executive Summary</a:t>
+            </a:r>
+          </a:p>
+        </p:txBody>
+      </p:sp>
+      <p:sp>
+        <p:nvSpPr>
+          <p:cNvPr id="4" name="Rectangle 3"/>
           <p:cNvSpPr/>
           <p:nvPr/>
         </p:nvSpPr>
@@ -4358,7 +4273,7 @@
             <a:off x="457200" y="1097280"/>
             <a:ext cx="1920240" cy="1097280"/>
           </a:xfrm>
-          <a:prstGeom prst="roundRect">
+          <a:prstGeom prst="rect">
             <a:avLst/>
           </a:prstGeom>
           <a:solidFill>
@@ -4400,8 +4315,8 @@
         </p:nvSpPr>
         <p:spPr>
           <a:xfrm>
-            <a:off x="548640" y="1188720"/>
-            <a:ext cx="1737360" cy="914400"/>
+            <a:off x="457200" y="1188720"/>
+            <a:ext cx="1920240" cy="914400"/>
           </a:xfrm>
           <a:prstGeom prst="rect">
             <a:avLst/>
@@ -4409,42 +4324,43 @@
           <a:noFill/>
         </p:spPr>
         <p:txBody>
-          <a:bodyPr wrap="none">
+          <a:bodyPr wrap="square">
             <a:spAutoFit/>
           </a:bodyPr>
           <a:lstStyle/>
           <a:p>
-            <a:pPr>
+            <a:pPr algn="ctr">
               <a:defRPr sz="1000">
                 <a:solidFill>
-                  <a:srgbClr val="475569"/>
-                </a:solidFill>
-              </a:defRPr>
-            </a:pPr>
-            <a:r>
-              <a:rPr>
-                <a:solidFill>
                   <a:srgbClr val="292929"/>
                 </a:solidFill>
-              </a:rPr>
+              </a:defRPr>
+            </a:pPr>
+            <a:r>
               <a:t>Total Launches</a:t>
             </a:r>
-            <a:br/>
-            <a:r>
-              <a:rPr>
+          </a:p>
+          <a:p>
+            <a:pPr algn="ctr">
+              <a:defRPr sz="2000" b="1">
+                <a:solidFill>
+                  <a:srgbClr val="005DAA"/>
+                </a:solidFill>
+              </a:defRPr>
+            </a:pPr>
+            <a:r>
+              <a:t>578</a:t>
+            </a:r>
+          </a:p>
+          <a:p>
+            <a:pPr algn="ctr">
+              <a:defRPr sz="900">
                 <a:solidFill>
                   <a:srgbClr val="292929"/>
                 </a:solidFill>
-              </a:rPr>
-              <a:t>578</a:t>
-            </a:r>
-            <a:br/>
-            <a:r>
-              <a:rPr>
-                <a:solidFill>
-                  <a:srgbClr val="292929"/>
-                </a:solidFill>
-              </a:rPr>
+              </a:defRPr>
+            </a:pPr>
+            <a:r>
               <a:t>+33 YoY</a:t>
             </a:r>
           </a:p>
@@ -4452,7 +4368,7 @@
       </p:sp>
       <p:sp>
         <p:nvSpPr>
-          <p:cNvPr id="6" name="Rounded Rectangle 5"/>
+          <p:cNvPr id="6" name="Rectangle 5"/>
           <p:cNvSpPr/>
           <p:nvPr/>
         </p:nvSpPr>
@@ -4461,7 +4377,7 @@
             <a:off x="2560320" y="1097280"/>
             <a:ext cx="1920240" cy="1097280"/>
           </a:xfrm>
-          <a:prstGeom prst="roundRect">
+          <a:prstGeom prst="rect">
             <a:avLst/>
           </a:prstGeom>
           <a:solidFill>
@@ -4469,7 +4385,7 @@
           </a:solidFill>
           <a:ln w="25400">
             <a:solidFill>
-              <a:srgbClr val="22C55E"/>
+              <a:srgbClr val="005DAA"/>
             </a:solidFill>
           </a:ln>
         </p:spPr>
@@ -4503,8 +4419,8 @@
         </p:nvSpPr>
         <p:spPr>
           <a:xfrm>
-            <a:off x="2651760" y="1188720"/>
-            <a:ext cx="1737360" cy="914400"/>
+            <a:off x="2560320" y="1188720"/>
+            <a:ext cx="1920240" cy="914400"/>
           </a:xfrm>
           <a:prstGeom prst="rect">
             <a:avLst/>
@@ -4512,42 +4428,43 @@
           <a:noFill/>
         </p:spPr>
         <p:txBody>
-          <a:bodyPr wrap="none">
+          <a:bodyPr wrap="square">
             <a:spAutoFit/>
           </a:bodyPr>
           <a:lstStyle/>
           <a:p>
-            <a:pPr>
+            <a:pPr algn="ctr">
               <a:defRPr sz="1000">
                 <a:solidFill>
-                  <a:srgbClr val="475569"/>
-                </a:solidFill>
-              </a:defRPr>
-            </a:pPr>
-            <a:r>
-              <a:rPr>
-                <a:solidFill>
                   <a:srgbClr val="292929"/>
                 </a:solidFill>
-              </a:rPr>
+              </a:defRPr>
+            </a:pPr>
+            <a:r>
               <a:t>Success Rate</a:t>
             </a:r>
-            <a:br/>
-            <a:r>
-              <a:rPr>
+          </a:p>
+          <a:p>
+            <a:pPr algn="ctr">
+              <a:defRPr sz="2000" b="1">
+                <a:solidFill>
+                  <a:srgbClr val="005DAA"/>
+                </a:solidFill>
+              </a:defRPr>
+            </a:pPr>
+            <a:r>
+              <a:t>98.6%</a:t>
+            </a:r>
+          </a:p>
+          <a:p>
+            <a:pPr algn="ctr">
+              <a:defRPr sz="900">
                 <a:solidFill>
                   <a:srgbClr val="292929"/>
                 </a:solidFill>
-              </a:rPr>
-              <a:t>98.6%</a:t>
-            </a:r>
-            <a:br/>
-            <a:r>
-              <a:rPr>
-                <a:solidFill>
-                  <a:srgbClr val="292929"/>
-                </a:solidFill>
-              </a:rPr>
+              </a:defRPr>
+            </a:pPr>
+            <a:r>
               <a:t>+1.3%</a:t>
             </a:r>
           </a:p>
@@ -4555,7 +4472,7 @@
       </p:sp>
       <p:sp>
         <p:nvSpPr>
-          <p:cNvPr id="8" name="Rounded Rectangle 7"/>
+          <p:cNvPr id="8" name="Rectangle 7"/>
           <p:cNvSpPr/>
           <p:nvPr/>
         </p:nvSpPr>
@@ -4564,7 +4481,7 @@
             <a:off x="4663440" y="1097280"/>
             <a:ext cx="1920240" cy="1097280"/>
           </a:xfrm>
-          <a:prstGeom prst="roundRect">
+          <a:prstGeom prst="rect">
             <a:avLst/>
           </a:prstGeom>
           <a:solidFill>
@@ -4572,7 +4489,7 @@
           </a:solidFill>
           <a:ln w="25400">
             <a:solidFill>
-              <a:srgbClr val="8B5CF6"/>
+              <a:srgbClr val="005DAA"/>
             </a:solidFill>
           </a:ln>
         </p:spPr>
@@ -4606,8 +4523,8 @@
         </p:nvSpPr>
         <p:spPr>
           <a:xfrm>
-            <a:off x="4754879" y="1188720"/>
-            <a:ext cx="1737360" cy="914400"/>
+            <a:off x="4663440" y="1188720"/>
+            <a:ext cx="1920240" cy="914400"/>
           </a:xfrm>
           <a:prstGeom prst="rect">
             <a:avLst/>
@@ -4615,59 +4532,60 @@
           <a:noFill/>
         </p:spPr>
         <p:txBody>
-          <a:bodyPr wrap="none">
+          <a:bodyPr wrap="square">
             <a:spAutoFit/>
           </a:bodyPr>
           <a:lstStyle/>
           <a:p>
-            <a:pPr>
+            <a:pPr algn="ctr">
               <a:defRPr sz="1000">
                 <a:solidFill>
-                  <a:srgbClr val="475569"/>
-                </a:solidFill>
-              </a:defRPr>
-            </a:pPr>
-            <a:r>
-              <a:rPr>
-                <a:solidFill>
                   <a:srgbClr val="292929"/>
                 </a:solidFill>
-              </a:rPr>
-              <a:t>Cost per Launch</a:t>
-            </a:r>
-            <a:br/>
-            <a:r>
-              <a:rPr>
+              </a:defRPr>
+            </a:pPr>
+            <a:r>
+              <a:t>Active Sites</a:t>
+            </a:r>
+          </a:p>
+          <a:p>
+            <a:pPr algn="ctr">
+              <a:defRPr sz="2000" b="1">
+                <a:solidFill>
+                  <a:srgbClr val="005DAA"/>
+                </a:solidFill>
+              </a:defRPr>
+            </a:pPr>
+            <a:r>
+              <a:t>4</a:t>
+            </a:r>
+          </a:p>
+          <a:p>
+            <a:pPr algn="ctr">
+              <a:defRPr sz="900">
                 <a:solidFill>
                   <a:srgbClr val="292929"/>
                 </a:solidFill>
-              </a:rPr>
-              <a:t>$69M</a:t>
-            </a:r>
-            <a:br/>
-            <a:r>
-              <a:rPr>
-                <a:solidFill>
-                  <a:srgbClr val="292929"/>
-                </a:solidFill>
-              </a:rPr>
-              <a:t>(avg, list price)</a:t>
-            </a:r>
-          </a:p>
-        </p:txBody>
-      </p:sp>
-      <p:sp>
-        <p:nvSpPr>
-          <p:cNvPr id="10" name="Rounded Rectangle 9"/>
+              </a:defRPr>
+            </a:pPr>
+            <a:r>
+              <a:t>USA</a:t>
+            </a:r>
+          </a:p>
+        </p:txBody>
+      </p:sp>
+      <p:sp>
+        <p:nvSpPr>
+          <p:cNvPr id="10" name="Rectangle 9"/>
           <p:cNvSpPr/>
           <p:nvPr/>
         </p:nvSpPr>
         <p:spPr>
           <a:xfrm>
-            <a:off x="6766559" y="1097280"/>
+            <a:off x="6766560" y="1097280"/>
             <a:ext cx="1920240" cy="1097280"/>
           </a:xfrm>
-          <a:prstGeom prst="roundRect">
+          <a:prstGeom prst="rect">
             <a:avLst/>
           </a:prstGeom>
           <a:solidFill>
@@ -4675,7 +4593,7 @@
           </a:solidFill>
           <a:ln w="25400">
             <a:solidFill>
-              <a:srgbClr val="7DD3FC"/>
+              <a:srgbClr val="005DAA"/>
             </a:solidFill>
           </a:ln>
         </p:spPr>
@@ -4709,8 +4627,8 @@
         </p:nvSpPr>
         <p:spPr>
           <a:xfrm>
-            <a:off x="6857999" y="1188720"/>
-            <a:ext cx="1737360" cy="914400"/>
+            <a:off x="6766560" y="1188720"/>
+            <a:ext cx="1920240" cy="914400"/>
           </a:xfrm>
           <a:prstGeom prst="rect">
             <a:avLst/>
@@ -4718,68 +4636,133 @@
           <a:noFill/>
         </p:spPr>
         <p:txBody>
-          <a:bodyPr wrap="none">
+          <a:bodyPr wrap="square">
             <a:spAutoFit/>
           </a:bodyPr>
           <a:lstStyle/>
           <a:p>
-            <a:pPr>
+            <a:pPr algn="ctr">
               <a:defRPr sz="1000">
                 <a:solidFill>
-                  <a:srgbClr val="475569"/>
-                </a:solidFill>
-              </a:defRPr>
-            </a:pPr>
-            <a:r>
-              <a:rPr>
-                <a:solidFill>
                   <a:srgbClr val="292929"/>
                 </a:solidFill>
-              </a:rPr>
-              <a:t>Reusability Rate</a:t>
-            </a:r>
-            <a:br/>
-            <a:r>
-              <a:rPr>
+              </a:defRPr>
+            </a:pPr>
+            <a:r>
+              <a:t>Reusability</a:t>
+            </a:r>
+          </a:p>
+          <a:p>
+            <a:pPr algn="ctr">
+              <a:defRPr sz="2000" b="1">
+                <a:solidFill>
+                  <a:srgbClr val="005DAA"/>
+                </a:solidFill>
+              </a:defRPr>
+            </a:pPr>
+            <a:r>
+              <a:t>83.7%</a:t>
+            </a:r>
+          </a:p>
+          <a:p>
+            <a:pPr algn="ctr">
+              <a:defRPr sz="900">
                 <a:solidFill>
                   <a:srgbClr val="292929"/>
                 </a:solidFill>
-              </a:rPr>
-              <a:t>97.8%</a:t>
-            </a:r>
-            <a:br/>
-            <a:r>
-              <a:rPr>
-                <a:solidFill>
-                  <a:srgbClr val="292929"/>
-                </a:solidFill>
-              </a:rPr>
-              <a:t>(2024 only)</a:t>
-            </a:r>
-          </a:p>
-        </p:txBody>
-      </p:sp>
-      <p:sp>
-        <p:nvSpPr>
-          <p:cNvPr id="12" name="Rectangle 11"/>
+              </a:defRPr>
+            </a:pPr>
+            <a:r>
+              <a:t>484 missions</a:t>
+            </a:r>
+          </a:p>
+        </p:txBody>
+      </p:sp>
+      <p:pic>
+        <p:nvPicPr>
+          <p:cNvPr id="12" name="Picture 11" descr="page1_launch_map.png"/>
+          <p:cNvPicPr>
+            <a:picLocks noChangeAspect="1"/>
+          </p:cNvPicPr>
+          <p:nvPr/>
+        </p:nvPicPr>
+        <p:blipFill>
+          <a:blip r:embed="rId2"/>
+          <a:stretch>
+            <a:fillRect/>
+          </a:stretch>
+        </p:blipFill>
+        <p:spPr>
+          <a:xfrm>
+            <a:off x="457200" y="2560320"/>
+            <a:ext cx="4114800" cy="3657600"/>
+          </a:xfrm>
+          <a:prstGeom prst="rect">
+            <a:avLst/>
+          </a:prstGeom>
+        </p:spPr>
+      </p:pic>
+      <p:pic>
+        <p:nvPicPr>
+          <p:cNvPr id="13" name="Picture 12" descr="page1_launch_trend.png"/>
+          <p:cNvPicPr>
+            <a:picLocks noChangeAspect="1"/>
+          </p:cNvPicPr>
+          <p:nvPr/>
+        </p:nvPicPr>
+        <p:blipFill>
+          <a:blip r:embed="rId3"/>
+          <a:stretch>
+            <a:fillRect/>
+          </a:stretch>
+        </p:blipFill>
+        <p:spPr>
+          <a:xfrm>
+            <a:off x="4754880" y="2560320"/>
+            <a:ext cx="3931920" cy="3657600"/>
+          </a:xfrm>
+          <a:prstGeom prst="rect">
+            <a:avLst/>
+          </a:prstGeom>
+        </p:spPr>
+      </p:pic>
+    </p:spTree>
+  </p:cSld>
+  <p:clrMapOvr>
+    <a:masterClrMapping/>
+  </p:clrMapOvr>
+</p:sld>
+</file>
+
+<file path=ppt/slides/slide4.xml><?xml version="1.0" encoding="utf-8"?>
+<p:sld xmlns:a="http://schemas.openxmlformats.org/drawingml/2006/main" xmlns:p="http://schemas.openxmlformats.org/presentationml/2006/main" xmlns:r="http://schemas.openxmlformats.org/officeDocument/2006/relationships">
+  <p:cSld>
+    <p:spTree>
+      <p:nvGrpSpPr>
+        <p:cNvPr id="1" name=""/>
+        <p:cNvGrpSpPr/>
+        <p:nvPr/>
+      </p:nvGrpSpPr>
+      <p:grpSpPr/>
+      <p:sp>
+        <p:nvSpPr>
+          <p:cNvPr id="2" name="Rectangle 1"/>
           <p:cNvSpPr/>
           <p:nvPr/>
         </p:nvSpPr>
         <p:spPr>
           <a:xfrm>
-            <a:off x="457200" y="2560320"/>
-            <a:ext cx="4114800" cy="2286000"/>
+            <a:off x="0" y="0"/>
+            <a:ext cx="9144000" cy="731520"/>
           </a:xfrm>
           <a:prstGeom prst="rect">
             <a:avLst/>
           </a:prstGeom>
           <a:solidFill>
-            <a:srgbClr val="FFFFFF"/>
+            <a:srgbClr val="005DAA"/>
           </a:solidFill>
           <a:ln>
-            <a:solidFill>
-              <a:srgbClr val="9CA3AF"/>
-            </a:solidFill>
+            <a:noFill/>
           </a:ln>
         </p:spPr>
         <p:style>
@@ -4804,9 +4787,79 @@
           </a:p>
         </p:txBody>
       </p:sp>
+      <p:sp>
+        <p:nvSpPr>
+          <p:cNvPr id="3" name="TextBox 2"/>
+          <p:cNvSpPr txBox="1"/>
+          <p:nvPr/>
+        </p:nvSpPr>
+        <p:spPr>
+          <a:xfrm>
+            <a:off x="274320" y="91440"/>
+            <a:ext cx="8595360" cy="548640"/>
+          </a:xfrm>
+          <a:prstGeom prst="rect">
+            <a:avLst/>
+          </a:prstGeom>
+          <a:noFill/>
+        </p:spPr>
+        <p:txBody>
+          <a:bodyPr wrap="none">
+            <a:spAutoFit/>
+          </a:bodyPr>
+          <a:lstStyle/>
+          <a:p>
+            <a:pPr>
+              <a:defRPr sz="2400" b="1">
+                <a:solidFill>
+                  <a:srgbClr val="FFFFFF"/>
+                </a:solidFill>
+              </a:defRPr>
+            </a:pPr>
+            <a:r>
+              <a:t>Page 2: Success Story - Landing &amp; Reusability</a:t>
+            </a:r>
+          </a:p>
+        </p:txBody>
+      </p:sp>
+      <p:sp>
+        <p:nvSpPr>
+          <p:cNvPr id="4" name="TextBox 3"/>
+          <p:cNvSpPr txBox="1"/>
+          <p:nvPr/>
+        </p:nvSpPr>
+        <p:spPr>
+          <a:xfrm>
+            <a:off x="457200" y="914400"/>
+            <a:ext cx="8229600" cy="548640"/>
+          </a:xfrm>
+          <a:prstGeom prst="rect">
+            <a:avLst/>
+          </a:prstGeom>
+          <a:noFill/>
+        </p:spPr>
+        <p:txBody>
+          <a:bodyPr wrap="none">
+            <a:spAutoFit/>
+          </a:bodyPr>
+          <a:lstStyle/>
+          <a:p>
+            <a:pPr algn="ctr">
+              <a:defRPr sz="1400" b="1">
+                <a:solidFill>
+                  <a:srgbClr val="22C55E"/>
+                </a:solidFill>
+              </a:defRPr>
+            </a:pPr>
+            <a:r>
+              <a:t>🎯 Landing Success: 93% (507/545 attempts) | Reusability: 83.7% of all missions using reused boosters</a:t>
+            </a:r>
+          </a:p>
+        </p:txBody>
+      </p:sp>
       <p:pic>
         <p:nvPicPr>
-          <p:cNvPr id="18" name="Picture 17" descr="page1_launch_cadence.png"/>
+          <p:cNvPr id="5" name="Picture 4" descr="page2_landing_evolution.png"/>
           <p:cNvPicPr>
             <a:picLocks noChangeAspect="1"/>
           </p:cNvPicPr>
@@ -4820,31 +4873,76 @@
         </p:blipFill>
         <p:spPr>
           <a:xfrm>
-            <a:off x="457200" y="2560320"/>
-            <a:ext cx="4114800" cy="2286000"/>
+            <a:off x="457200" y="1645920"/>
+            <a:ext cx="8229600" cy="2194560"/>
           </a:xfrm>
           <a:prstGeom prst="rect">
             <a:avLst/>
           </a:prstGeom>
         </p:spPr>
       </p:pic>
-      <p:sp>
-        <p:nvSpPr>
-          <p:cNvPr id="16" name="Rectangle 15"/>
+      <p:pic>
+        <p:nvPicPr>
+          <p:cNvPr id="6" name="Picture 5" descr="page2_reusability_rate.png"/>
+          <p:cNvPicPr>
+            <a:picLocks noChangeAspect="1"/>
+          </p:cNvPicPr>
+          <p:nvPr/>
+        </p:nvPicPr>
+        <p:blipFill>
+          <a:blip r:embed="rId3"/>
+          <a:stretch>
+            <a:fillRect/>
+          </a:stretch>
+        </p:blipFill>
+        <p:spPr>
+          <a:xfrm>
+            <a:off x="457200" y="4023360"/>
+            <a:ext cx="8229600" cy="2194560"/>
+          </a:xfrm>
+          <a:prstGeom prst="rect">
+            <a:avLst/>
+          </a:prstGeom>
+        </p:spPr>
+      </p:pic>
+    </p:spTree>
+  </p:cSld>
+  <p:clrMapOvr>
+    <a:masterClrMapping/>
+  </p:clrMapOvr>
+</p:sld>
+</file>
+
+<file path=ppt/slides/slide5.xml><?xml version="1.0" encoding="utf-8"?>
+<p:sld xmlns:a="http://schemas.openxmlformats.org/drawingml/2006/main" xmlns:p="http://schemas.openxmlformats.org/presentationml/2006/main" xmlns:r="http://schemas.openxmlformats.org/officeDocument/2006/relationships">
+  <p:cSld>
+    <p:spTree>
+      <p:nvGrpSpPr>
+        <p:cNvPr id="1" name=""/>
+        <p:cNvGrpSpPr/>
+        <p:nvPr/>
+      </p:nvGrpSpPr>
+      <p:grpSpPr/>
+      <p:sp>
+        <p:nvSpPr>
+          <p:cNvPr id="2" name="Rectangle 1"/>
           <p:cNvSpPr/>
           <p:nvPr/>
         </p:nvSpPr>
         <p:spPr>
           <a:xfrm>
-            <a:off x="457200" y="5029200"/>
-            <a:ext cx="8229600" cy="1188720"/>
+            <a:off x="0" y="0"/>
+            <a:ext cx="9144000" cy="731520"/>
           </a:xfrm>
           <a:prstGeom prst="rect">
             <a:avLst/>
           </a:prstGeom>
           <a:solidFill>
-            <a:srgbClr val="292929"/>
+            <a:srgbClr val="005DAA"/>
           </a:solidFill>
+          <a:ln>
+            <a:noFill/>
+          </a:ln>
         </p:spPr>
         <p:style>
           <a:lnRef idx="1">
@@ -4870,14 +4968,14 @@
       </p:sp>
       <p:sp>
         <p:nvSpPr>
-          <p:cNvPr id="17" name="TextBox 16"/>
+          <p:cNvPr id="3" name="TextBox 2"/>
           <p:cNvSpPr txBox="1"/>
           <p:nvPr/>
         </p:nvSpPr>
         <p:spPr>
           <a:xfrm>
-            <a:off x="640080" y="5120640"/>
-            <a:ext cx="7863840" cy="1005840"/>
+            <a:off x="274320" y="91440"/>
+            <a:ext cx="8595360" cy="548640"/>
           </a:xfrm>
           <a:prstGeom prst="rect">
             <a:avLst/>
@@ -4891,124 +4989,33 @@
           <a:lstStyle/>
           <a:p>
             <a:pPr>
-              <a:defRPr sz="1200" b="1">
-                <a:solidFill>
-                  <a:srgbClr val="7DD3FC"/>
-                </a:solidFill>
-              </a:defRPr>
-            </a:pPr>
-            <a:r>
-              <a:t>Key Insights (From CSV Data)</a:t>
-            </a:r>
-          </a:p>
-          <a:p>
-            <a:r>
-              <a:t>• 2024: Record 182 launches (up 33 from 2023)</a:t>
-            </a:r>
-          </a:p>
-          <a:p>
-            <a:r>
-              <a:t>• Overall success rate: 98.6% across 578 missions</a:t>
-            </a:r>
-          </a:p>
-          <a:p>
-            <a:r>
-              <a:t>• Booster reuse rate reached 97.8% in 2024</a:t>
-            </a:r>
-          </a:p>
-          <a:p>
-            <a:r>
-              <a:t>• Landing success improved from 50% (2015) to 99.4% (2024)</a:t>
-            </a:r>
-          </a:p>
-        </p:txBody>
-      </p:sp>
-    </p:spTree>
-  </p:cSld>
-  <p:clrMapOvr>
-    <a:masterClrMapping/>
-  </p:clrMapOvr>
-</p:sld>
-</file>
-
-<file path=ppt/slides/slide4.xml><?xml version="1.0" encoding="utf-8"?>
-<p:sld xmlns:a="http://schemas.openxmlformats.org/drawingml/2006/main" xmlns:p="http://schemas.openxmlformats.org/presentationml/2006/main" xmlns:r="http://schemas.openxmlformats.org/officeDocument/2006/relationships">
-  <p:cSld>
-    <p:bg>
-      <p:bgPr>
-        <a:solidFill>
-          <a:srgbClr val="F8FAFC"/>
-        </a:solidFill>
-        <a:effectLst/>
-      </p:bgPr>
-    </p:bg>
-    <p:spTree>
-      <p:nvGrpSpPr>
-        <p:cNvPr id="1" name=""/>
-        <p:cNvGrpSpPr/>
-        <p:nvPr/>
-      </p:nvGrpSpPr>
-      <p:grpSpPr/>
-      <p:sp>
-        <p:nvSpPr>
-          <p:cNvPr id="2" name="Rectangle 1"/>
-          <p:cNvSpPr/>
+              <a:defRPr sz="2400" b="1">
+                <a:solidFill>
+                  <a:srgbClr val="FFFFFF"/>
+                </a:solidFill>
+              </a:defRPr>
+            </a:pPr>
+            <a:r>
+              <a:t>Page 3: Improvement Opportunities</a:t>
+            </a:r>
+          </a:p>
+        </p:txBody>
+      </p:sp>
+      <p:sp>
+        <p:nvSpPr>
+          <p:cNvPr id="4" name="TextBox 3"/>
+          <p:cNvSpPr txBox="1"/>
           <p:nvPr/>
         </p:nvSpPr>
         <p:spPr>
           <a:xfrm>
-            <a:off x="0" y="0"/>
-            <a:ext cx="9144000" cy="731520"/>
+            <a:off x="457200" y="914400"/>
+            <a:ext cx="8229600" cy="548640"/>
           </a:xfrm>
           <a:prstGeom prst="rect">
             <a:avLst/>
           </a:prstGeom>
-          <a:solidFill>
-            <a:srgbClr val="005DAA"/>
-          </a:solidFill>
-          <a:ln>
-            <a:noFill/>
-          </a:ln>
-        </p:spPr>
-        <p:style>
-          <a:lnRef idx="1">
-            <a:schemeClr val="accent1"/>
-          </a:lnRef>
-          <a:fillRef idx="3">
-            <a:schemeClr val="accent1"/>
-          </a:fillRef>
-          <a:effectRef idx="2">
-            <a:schemeClr val="accent1"/>
-          </a:effectRef>
-          <a:fontRef idx="minor">
-            <a:schemeClr val="lt1"/>
-          </a:fontRef>
-        </p:style>
-        <p:txBody>
-          <a:bodyPr rtlCol="0" anchor="ctr"/>
-          <a:lstStyle/>
-          <a:p>
-            <a:pPr algn="ctr"/>
-          </a:p>
-        </p:txBody>
-      </p:sp>
-      <p:sp>
-        <p:nvSpPr>
-          <p:cNvPr id="3" name="TextBox 2"/>
-          <p:cNvSpPr txBox="1"/>
-          <p:nvPr/>
-        </p:nvSpPr>
-        <p:spPr>
-          <a:xfrm>
-            <a:off x="274320" y="91440"/>
-            <a:ext cx="8595360" cy="548640"/>
-          </a:xfrm>
-          <a:prstGeom prst="rect">
-            <a:avLst/>
-          </a:prstGeom>
-          <a:solidFill>
-            <a:srgbClr val="005DAA"/>
-          </a:solidFill>
+          <a:noFill/>
         </p:spPr>
         <p:txBody>
           <a:bodyPr wrap="none">
@@ -5016,72 +5023,22 @@
           </a:bodyPr>
           <a:lstStyle/>
           <a:p>
-            <a:pPr>
-              <a:defRPr sz="2400" b="1">
-                <a:solidFill>
-                  <a:srgbClr val="FFFFFF"/>
-                </a:solidFill>
-              </a:defRPr>
-            </a:pPr>
-            <a:r>
-              <a:rPr>
-                <a:solidFill>
-                  <a:srgbClr val="292929"/>
-                </a:solidFill>
-              </a:rPr>
-              <a:t>Page 2: Success Metrics &amp; Achievements</a:t>
-            </a:r>
-          </a:p>
-        </p:txBody>
-      </p:sp>
-      <p:sp>
-        <p:nvSpPr>
-          <p:cNvPr id="4" name="Rectangle 3"/>
-          <p:cNvSpPr/>
-          <p:nvPr/>
-        </p:nvSpPr>
-        <p:spPr>
-          <a:xfrm>
-            <a:off x="457200" y="1097280"/>
-            <a:ext cx="8229600" cy="1371600"/>
-          </a:xfrm>
-          <a:prstGeom prst="rect">
-            <a:avLst/>
-          </a:prstGeom>
-          <a:solidFill>
-            <a:srgbClr val="FFFFFF"/>
-          </a:solidFill>
-          <a:ln>
-            <a:solidFill>
-              <a:srgbClr val="9CA3AF"/>
-            </a:solidFill>
-          </a:ln>
-        </p:spPr>
-        <p:style>
-          <a:lnRef idx="1">
-            <a:schemeClr val="accent1"/>
-          </a:lnRef>
-          <a:fillRef idx="3">
-            <a:schemeClr val="accent1"/>
-          </a:fillRef>
-          <a:effectRef idx="2">
-            <a:schemeClr val="accent1"/>
-          </a:effectRef>
-          <a:fontRef idx="minor">
-            <a:schemeClr val="lt1"/>
-          </a:fontRef>
-        </p:style>
-        <p:txBody>
-          <a:bodyPr rtlCol="0" anchor="ctr"/>
-          <a:lstStyle/>
-          <a:p>
-            <a:pPr algn="ctr"/>
+            <a:pPr algn="ctr">
+              <a:defRPr sz="1400" b="1">
+                <a:solidFill>
+                  <a:srgbClr val="FB923C"/>
+                </a:solidFill>
+              </a:defRPr>
+            </a:pPr>
+            <a:r>
+              <a:t>⚠️ Focus Areas: 8 launch failures (1.4%) | 38 landing failures (7%) | Starship: 66.7% success rate</a:t>
+            </a:r>
           </a:p>
         </p:txBody>
       </p:sp>
       <p:pic>
         <p:nvPicPr>
-          <p:cNvPr id="12" name="Picture 11" descr="page3_timeline.png"/>
+          <p:cNvPr id="5" name="Picture 4" descr="page3_failures_by_year.png"/>
           <p:cNvPicPr>
             <a:picLocks noChangeAspect="1"/>
           </p:cNvPicPr>
@@ -5095,62 +5052,17 @@
         </p:blipFill>
         <p:spPr>
           <a:xfrm>
-            <a:off x="640080" y="1188720"/>
-            <a:ext cx="7863840" cy="1188720"/>
+            <a:off x="457200" y="1645920"/>
+            <a:ext cx="3931920" cy="2377440"/>
           </a:xfrm>
           <a:prstGeom prst="rect">
             <a:avLst/>
           </a:prstGeom>
         </p:spPr>
       </p:pic>
-      <p:sp>
-        <p:nvSpPr>
-          <p:cNvPr id="6" name="Rectangle 5"/>
-          <p:cNvSpPr/>
-          <p:nvPr/>
-        </p:nvSpPr>
-        <p:spPr>
-          <a:xfrm>
-            <a:off x="457200" y="2651760"/>
-            <a:ext cx="4114800" cy="2103120"/>
-          </a:xfrm>
-          <a:prstGeom prst="rect">
-            <a:avLst/>
-          </a:prstGeom>
-          <a:solidFill>
-            <a:srgbClr val="FFFFFF"/>
-          </a:solidFill>
-          <a:ln>
-            <a:solidFill>
-              <a:srgbClr val="9CA3AF"/>
-            </a:solidFill>
-          </a:ln>
-        </p:spPr>
-        <p:style>
-          <a:lnRef idx="1">
-            <a:schemeClr val="accent1"/>
-          </a:lnRef>
-          <a:fillRef idx="3">
-            <a:schemeClr val="accent1"/>
-          </a:fillRef>
-          <a:effectRef idx="2">
-            <a:schemeClr val="accent1"/>
-          </a:effectRef>
-          <a:fontRef idx="minor">
-            <a:schemeClr val="lt1"/>
-          </a:fontRef>
-        </p:style>
-        <p:txBody>
-          <a:bodyPr rtlCol="0" anchor="ctr"/>
-          <a:lstStyle/>
-          <a:p>
-            <a:pPr algn="ctr"/>
-          </a:p>
-        </p:txBody>
-      </p:sp>
       <p:pic>
         <p:nvPicPr>
-          <p:cNvPr id="13" name="Picture 12" descr="page3_landing_evolution.png"/>
+          <p:cNvPr id="6" name="Picture 5" descr="page3_vehicle_success.png"/>
           <p:cNvPicPr>
             <a:picLocks noChangeAspect="1"/>
           </p:cNvPicPr>
@@ -5164,62 +5076,17 @@
         </p:blipFill>
         <p:spPr>
           <a:xfrm>
-            <a:off x="640080" y="2743200"/>
-            <a:ext cx="3749039" cy="1920240"/>
+            <a:off x="4754880" y="1645920"/>
+            <a:ext cx="3931920" cy="2377440"/>
           </a:xfrm>
           <a:prstGeom prst="rect">
             <a:avLst/>
           </a:prstGeom>
         </p:spPr>
       </p:pic>
-      <p:sp>
-        <p:nvSpPr>
-          <p:cNvPr id="8" name="Rectangle 7"/>
-          <p:cNvSpPr/>
-          <p:nvPr/>
-        </p:nvSpPr>
-        <p:spPr>
-          <a:xfrm>
-            <a:off x="4663440" y="2651760"/>
-            <a:ext cx="4023360" cy="2103120"/>
-          </a:xfrm>
-          <a:prstGeom prst="rect">
-            <a:avLst/>
-          </a:prstGeom>
-          <a:solidFill>
-            <a:srgbClr val="FFFFFF"/>
-          </a:solidFill>
-          <a:ln>
-            <a:solidFill>
-              <a:srgbClr val="9CA3AF"/>
-            </a:solidFill>
-          </a:ln>
-        </p:spPr>
-        <p:style>
-          <a:lnRef idx="1">
-            <a:schemeClr val="accent1"/>
-          </a:lnRef>
-          <a:fillRef idx="3">
-            <a:schemeClr val="accent1"/>
-          </a:fillRef>
-          <a:effectRef idx="2">
-            <a:schemeClr val="accent1"/>
-          </a:effectRef>
-          <a:fontRef idx="minor">
-            <a:schemeClr val="lt1"/>
-          </a:fontRef>
-        </p:style>
-        <p:txBody>
-          <a:bodyPr rtlCol="0" anchor="ctr"/>
-          <a:lstStyle/>
-          <a:p>
-            <a:pPr algn="ctr"/>
-          </a:p>
-        </p:txBody>
-      </p:sp>
       <p:pic>
         <p:nvPicPr>
-          <p:cNvPr id="14" name="Picture 13" descr="page3_reusability_champions.png"/>
+          <p:cNvPr id="7" name="Picture 6" descr="page3_landing_failures.png"/>
           <p:cNvPicPr>
             <a:picLocks noChangeAspect="1"/>
           </p:cNvPicPr>
@@ -5233,54 +5100,14 @@
         </p:blipFill>
         <p:spPr>
           <a:xfrm>
-            <a:off x="4846320" y="2743200"/>
-            <a:ext cx="3657600" cy="1920240"/>
+            <a:off x="457200" y="4206240"/>
+            <a:ext cx="8229600" cy="2194560"/>
           </a:xfrm>
           <a:prstGeom prst="rect">
             <a:avLst/>
           </a:prstGeom>
         </p:spPr>
       </p:pic>
-      <p:sp>
-        <p:nvSpPr>
-          <p:cNvPr id="10" name="Rectangle 9"/>
-          <p:cNvSpPr/>
-          <p:nvPr/>
-        </p:nvSpPr>
-        <p:spPr>
-          <a:xfrm>
-            <a:off x="457200" y="4937760"/>
-            <a:ext cx="8229600" cy="1188720"/>
-          </a:xfrm>
-          <a:prstGeom prst="rect">
-            <a:avLst/>
-          </a:prstGeom>
-          <a:solidFill>
-            <a:srgbClr val="292929"/>
-          </a:solidFill>
-        </p:spPr>
-        <p:style>
-          <a:lnRef idx="1">
-            <a:schemeClr val="accent1"/>
-          </a:lnRef>
-          <a:fillRef idx="3">
-            <a:schemeClr val="accent1"/>
-          </a:fillRef>
-          <a:effectRef idx="2">
-            <a:schemeClr val="accent1"/>
-          </a:effectRef>
-          <a:fontRef idx="minor">
-            <a:schemeClr val="lt1"/>
-          </a:fontRef>
-        </p:style>
-        <p:txBody>
-          <a:bodyPr rtlCol="0" anchor="ctr"/>
-          <a:lstStyle/>
-          <a:p>
-            <a:pPr algn="ctr"/>
-          </a:p>
-        </p:txBody>
-      </p:sp>
     </p:spTree>
   </p:cSld>
   <p:clrMapOvr>
@@ -5289,375 +5116,9 @@
 </p:sld>
 </file>
 
-<file path=ppt/slides/slide4.xml><?xml version="1.0" encoding="utf-8"?>
+<file path=ppt/slides/slide6.xml><?xml version="1.0" encoding="utf-8"?>
 <p:sld xmlns:a="http://schemas.openxmlformats.org/drawingml/2006/main" xmlns:p="http://schemas.openxmlformats.org/presentationml/2006/main" xmlns:r="http://schemas.openxmlformats.org/officeDocument/2006/relationships">
   <p:cSld>
-    <p:bg>
-      <p:bgPr>
-        <a:solidFill>
-          <a:srgbClr val="F8FAFC"/>
-        </a:solidFill>
-        <a:effectLst/>
-      </p:bgPr>
-    </p:bg>
-    <p:spTree>
-      <p:nvGrpSpPr>
-        <p:cNvPr id="1" name=""/>
-        <p:cNvGrpSpPr/>
-        <p:nvPr/>
-      </p:nvGrpSpPr>
-      <p:grpSpPr/>
-      <p:sp>
-        <p:nvSpPr>
-          <p:cNvPr id="2" name="Rectangle 1"/>
-          <p:cNvSpPr/>
-          <p:nvPr/>
-        </p:nvSpPr>
-        <p:spPr>
-          <a:xfrm>
-            <a:off x="0" y="0"/>
-            <a:ext cx="9144000" cy="731520"/>
-          </a:xfrm>
-          <a:prstGeom prst="rect">
-            <a:avLst/>
-          </a:prstGeom>
-          <a:solidFill>
-            <a:srgbClr val="005DAA"/>
-          </a:solidFill>
-          <a:ln>
-            <a:noFill/>
-          </a:ln>
-        </p:spPr>
-        <p:style>
-          <a:lnRef idx="1">
-            <a:schemeClr val="accent1"/>
-          </a:lnRef>
-          <a:fillRef idx="3">
-            <a:schemeClr val="accent1"/>
-          </a:fillRef>
-          <a:effectRef idx="2">
-            <a:schemeClr val="accent1"/>
-          </a:effectRef>
-          <a:fontRef idx="minor">
-            <a:schemeClr val="lt1"/>
-          </a:fontRef>
-        </p:style>
-        <p:txBody>
-          <a:bodyPr rtlCol="0" anchor="ctr"/>
-          <a:lstStyle/>
-          <a:p>
-            <a:pPr algn="ctr"/>
-          </a:p>
-        </p:txBody>
-      </p:sp>
-      <p:sp>
-        <p:nvSpPr>
-          <p:cNvPr id="3" name="TextBox 2"/>
-          <p:cNvSpPr txBox="1"/>
-          <p:nvPr/>
-        </p:nvSpPr>
-        <p:spPr>
-          <a:xfrm>
-            <a:off x="274320" y="91440"/>
-            <a:ext cx="8595360" cy="548640"/>
-          </a:xfrm>
-          <a:prstGeom prst="rect">
-            <a:avLst/>
-          </a:prstGeom>
-          <a:solidFill>
-            <a:srgbClr val="005DAA"/>
-          </a:solidFill>
-        </p:spPr>
-        <p:txBody>
-          <a:bodyPr wrap="none">
-            <a:spAutoFit/>
-          </a:bodyPr>
-          <a:lstStyle/>
-          <a:p>
-            <a:pPr>
-              <a:defRPr sz="2400" b="1">
-                <a:solidFill>
-                  <a:srgbClr val="FFFFFF"/>
-                </a:solidFill>
-              </a:defRPr>
-            </a:pPr>
-            <a:r>
-              <a:rPr>
-                <a:solidFill>
-                  <a:srgbClr val="292929"/>
-                </a:solidFill>
-              </a:rPr>
-              <a:t>Page 2: Success Metrics &amp; Achievements</a:t>
-            </a:r>
-          </a:p>
-        </p:txBody>
-      </p:sp>
-      <p:sp>
-        <p:nvSpPr>
-          <p:cNvPr id="4" name="Rectangle 3"/>
-          <p:cNvSpPr/>
-          <p:nvPr/>
-        </p:nvSpPr>
-        <p:spPr>
-          <a:xfrm>
-            <a:off x="457200" y="1097280"/>
-            <a:ext cx="8229600" cy="1371600"/>
-          </a:xfrm>
-          <a:prstGeom prst="rect">
-            <a:avLst/>
-          </a:prstGeom>
-          <a:solidFill>
-            <a:srgbClr val="FFFFFF"/>
-          </a:solidFill>
-          <a:ln>
-            <a:solidFill>
-              <a:srgbClr val="9CA3AF"/>
-            </a:solidFill>
-          </a:ln>
-        </p:spPr>
-        <p:style>
-          <a:lnRef idx="1">
-            <a:schemeClr val="accent1"/>
-          </a:lnRef>
-          <a:fillRef idx="3">
-            <a:schemeClr val="accent1"/>
-          </a:fillRef>
-          <a:effectRef idx="2">
-            <a:schemeClr val="accent1"/>
-          </a:effectRef>
-          <a:fontRef idx="minor">
-            <a:schemeClr val="lt1"/>
-          </a:fontRef>
-        </p:style>
-        <p:txBody>
-          <a:bodyPr rtlCol="0" anchor="ctr"/>
-          <a:lstStyle/>
-          <a:p>
-            <a:pPr algn="ctr"/>
-          </a:p>
-        </p:txBody>
-      </p:sp>
-      <p:pic>
-        <p:nvPicPr>
-          <p:cNvPr id="12" name="Picture 11" descr="page3_timeline.png"/>
-          <p:cNvPicPr>
-            <a:picLocks noChangeAspect="1"/>
-          </p:cNvPicPr>
-          <p:nvPr/>
-        </p:nvPicPr>
-        <p:blipFill>
-          <a:blip r:embed="rId2"/>
-          <a:stretch>
-            <a:fillRect/>
-          </a:stretch>
-        </p:blipFill>
-        <p:spPr>
-          <a:xfrm>
-            <a:off x="640080" y="1188720"/>
-            <a:ext cx="7863840" cy="1188720"/>
-          </a:xfrm>
-          <a:prstGeom prst="rect">
-            <a:avLst/>
-          </a:prstGeom>
-        </p:spPr>
-      </p:pic>
-      <p:sp>
-        <p:nvSpPr>
-          <p:cNvPr id="6" name="Rectangle 5"/>
-          <p:cNvSpPr/>
-          <p:nvPr/>
-        </p:nvSpPr>
-        <p:spPr>
-          <a:xfrm>
-            <a:off x="457200" y="2651760"/>
-            <a:ext cx="4114800" cy="2103120"/>
-          </a:xfrm>
-          <a:prstGeom prst="rect">
-            <a:avLst/>
-          </a:prstGeom>
-          <a:solidFill>
-            <a:srgbClr val="FFFFFF"/>
-          </a:solidFill>
-          <a:ln>
-            <a:solidFill>
-              <a:srgbClr val="9CA3AF"/>
-            </a:solidFill>
-          </a:ln>
-        </p:spPr>
-        <p:style>
-          <a:lnRef idx="1">
-            <a:schemeClr val="accent1"/>
-          </a:lnRef>
-          <a:fillRef idx="3">
-            <a:schemeClr val="accent1"/>
-          </a:fillRef>
-          <a:effectRef idx="2">
-            <a:schemeClr val="accent1"/>
-          </a:effectRef>
-          <a:fontRef idx="minor">
-            <a:schemeClr val="lt1"/>
-          </a:fontRef>
-        </p:style>
-        <p:txBody>
-          <a:bodyPr rtlCol="0" anchor="ctr"/>
-          <a:lstStyle/>
-          <a:p>
-            <a:pPr algn="ctr"/>
-          </a:p>
-        </p:txBody>
-      </p:sp>
-      <p:pic>
-        <p:nvPicPr>
-          <p:cNvPr id="13" name="Picture 12" descr="page3_landing_evolution.png"/>
-          <p:cNvPicPr>
-            <a:picLocks noChangeAspect="1"/>
-          </p:cNvPicPr>
-          <p:nvPr/>
-        </p:nvPicPr>
-        <p:blipFill>
-          <a:blip r:embed="rId3"/>
-          <a:stretch>
-            <a:fillRect/>
-          </a:stretch>
-        </p:blipFill>
-        <p:spPr>
-          <a:xfrm>
-            <a:off x="640080" y="2743200"/>
-            <a:ext cx="3749039" cy="1920240"/>
-          </a:xfrm>
-          <a:prstGeom prst="rect">
-            <a:avLst/>
-          </a:prstGeom>
-        </p:spPr>
-      </p:pic>
-      <p:sp>
-        <p:nvSpPr>
-          <p:cNvPr id="8" name="Rectangle 7"/>
-          <p:cNvSpPr/>
-          <p:nvPr/>
-        </p:nvSpPr>
-        <p:spPr>
-          <a:xfrm>
-            <a:off x="4663440" y="2651760"/>
-            <a:ext cx="4023360" cy="2103120"/>
-          </a:xfrm>
-          <a:prstGeom prst="rect">
-            <a:avLst/>
-          </a:prstGeom>
-          <a:solidFill>
-            <a:srgbClr val="FFFFFF"/>
-          </a:solidFill>
-          <a:ln>
-            <a:solidFill>
-              <a:srgbClr val="9CA3AF"/>
-            </a:solidFill>
-          </a:ln>
-        </p:spPr>
-        <p:style>
-          <a:lnRef idx="1">
-            <a:schemeClr val="accent1"/>
-          </a:lnRef>
-          <a:fillRef idx="3">
-            <a:schemeClr val="accent1"/>
-          </a:fillRef>
-          <a:effectRef idx="2">
-            <a:schemeClr val="accent1"/>
-          </a:effectRef>
-          <a:fontRef idx="minor">
-            <a:schemeClr val="lt1"/>
-          </a:fontRef>
-        </p:style>
-        <p:txBody>
-          <a:bodyPr rtlCol="0" anchor="ctr"/>
-          <a:lstStyle/>
-          <a:p>
-            <a:pPr algn="ctr"/>
-          </a:p>
-        </p:txBody>
-      </p:sp>
-      <p:pic>
-        <p:nvPicPr>
-          <p:cNvPr id="14" name="Picture 13" descr="page3_reusability_champions.png"/>
-          <p:cNvPicPr>
-            <a:picLocks noChangeAspect="1"/>
-          </p:cNvPicPr>
-          <p:nvPr/>
-        </p:nvPicPr>
-        <p:blipFill>
-          <a:blip r:embed="rId4"/>
-          <a:stretch>
-            <a:fillRect/>
-          </a:stretch>
-        </p:blipFill>
-        <p:spPr>
-          <a:xfrm>
-            <a:off x="4846320" y="2743200"/>
-            <a:ext cx="3657600" cy="1920240"/>
-          </a:xfrm>
-          <a:prstGeom prst="rect">
-            <a:avLst/>
-          </a:prstGeom>
-        </p:spPr>
-      </p:pic>
-      <p:sp>
-        <p:nvSpPr>
-          <p:cNvPr id="10" name="Rectangle 9"/>
-          <p:cNvSpPr/>
-          <p:nvPr/>
-        </p:nvSpPr>
-        <p:spPr>
-          <a:xfrm>
-            <a:off x="457200" y="4937760"/>
-            <a:ext cx="8229600" cy="1188720"/>
-          </a:xfrm>
-          <a:prstGeom prst="rect">
-            <a:avLst/>
-          </a:prstGeom>
-          <a:solidFill>
-            <a:srgbClr val="292929"/>
-          </a:solidFill>
-        </p:spPr>
-        <p:style>
-          <a:lnRef idx="1">
-            <a:schemeClr val="accent1"/>
-          </a:lnRef>
-          <a:fillRef idx="3">
-            <a:schemeClr val="accent1"/>
-          </a:fillRef>
-          <a:effectRef idx="2">
-            <a:schemeClr val="accent1"/>
-          </a:effectRef>
-          <a:fontRef idx="minor">
-            <a:schemeClr val="lt1"/>
-          </a:fontRef>
-        </p:style>
-        <p:txBody>
-          <a:bodyPr rtlCol="0" anchor="ctr"/>
-          <a:lstStyle/>
-          <a:p>
-            <a:pPr algn="ctr"/>
-          </a:p>
-        </p:txBody>
-      </p:sp>
-    </p:spTree>
-  </p:cSld>
-  <p:clrMapOvr>
-    <a:masterClrMapping/>
-  </p:clrMapOvr>
-</p:sld>
-</file>
-
-<file path=ppt/slides/slide5.xml><?xml version="1.0" encoding="utf-8"?>
-<p:sld xmlns:a="http://schemas.openxmlformats.org/drawingml/2006/main" xmlns:p="http://schemas.openxmlformats.org/presentationml/2006/main" xmlns:r="http://schemas.openxmlformats.org/officeDocument/2006/relationships">
-  <p:cSld>
-    <p:bg>
-      <p:bgPr>
-        <a:solidFill>
-          <a:srgbClr val="FFFFFF"/>
-        </a:solidFill>
-        <a:effectLst/>
-      </p:bgPr>
-    </p:bg>
     <p:spTree>
       <p:nvGrpSpPr>
         <p:cNvPr id="1" name=""/>
